--- a/public/fun/pack/pptx/wedding/결혼식_25_감사·답례중심_연꽃연못.pptx
+++ b/public/fun/pack/pptx/wedding/결혼식_25_감사·답례중심_연꽃연못.pptx
@@ -3286,14 +3286,6 @@
 <file path=ppt/slides/slide1.xml><?xml version="1.0" encoding="utf-8"?>
 <p:sld xmlns:a="http://schemas.openxmlformats.org/drawingml/2006/main" xmlns:p="http://schemas.openxmlformats.org/presentationml/2006/main" xmlns:r="http://schemas.openxmlformats.org/officeDocument/2006/relationships">
   <p:cSld>
-    <p:bg>
-      <p:bgPr>
-        <a:solidFill>
-          <a:srgbClr val="7B3759"/>
-        </a:solidFill>
-        <a:effectLst/>
-      </p:bgPr>
-    </p:bg>
     <p:spTree>
       <p:nvGrpSpPr>
         <p:cNvPr id="1" name=""/>
@@ -3301,559 +3293,30 @@
         <p:nvPr/>
       </p:nvGrpSpPr>
       <p:grpSpPr/>
-      <p:sp>
-        <p:nvSpPr>
-          <p:cNvPr id="3" name="장식"/>
-          <p:cNvSpPr/>
+      <p:pic>
+        <p:nvPicPr>
+          <p:cNvPr id="3" name="표지 그림" descr="wedding-25.jpg"/>
+          <p:cNvPicPr>
+            <a:picLocks noChangeAspect="1"/>
+          </p:cNvPicPr>
           <p:nvPr/>
-        </p:nvSpPr>
-        <p:spPr>
-          <a:xfrm>
-            <a:off x="457200" y="457200"/>
-            <a:ext cx="11277295" cy="5943600"/>
-          </a:xfrm>
-          <a:prstGeom prst="roundRect">
-            <a:avLst>
-              <a:gd name="adj" fmla="val 5000"/>
-            </a:avLst>
-          </a:prstGeom>
-          <a:solidFill>
-            <a:srgbClr val="FFFFFF"/>
-          </a:solidFill>
-          <a:ln>
-            <a:noFill/>
-          </a:ln>
-        </p:spPr>
-        <p:txBody>
-          <a:bodyPr rtlCol="0" anchor="ctr"/>
-          <a:lstStyle/>
-          <a:p>
-            <a:pPr algn="ctr"/>
-          </a:p>
-        </p:txBody>
-      </p:sp>
-      <p:sp>
-        <p:nvSpPr>
-          <p:cNvPr id="4" name="장식"/>
-          <p:cNvSpPr/>
-          <p:nvPr/>
-        </p:nvSpPr>
-        <p:spPr>
-          <a:xfrm>
-            <a:off x="5892165" y="662482"/>
-            <a:ext cx="407365" cy="633679"/>
-          </a:xfrm>
-          <a:prstGeom prst="ellipse">
+        </p:nvPicPr>
+        <p:blipFill>
+          <a:blip r:embed="rId2"/>
+          <a:stretch>
+            <a:fillRect/>
+          </a:stretch>
+        </p:blipFill>
+        <p:spPr>
+          <a:xfrm>
+            <a:off x="0" y="0"/>
+            <a:ext cx="12191695" cy="6858000"/>
+          </a:xfrm>
+          <a:prstGeom prst="rect">
             <a:avLst/>
           </a:prstGeom>
-          <a:solidFill>
-            <a:srgbClr val="B8618C"/>
-          </a:solidFill>
-          <a:ln>
-            <a:noFill/>
-          </a:ln>
-        </p:spPr>
-        <p:txBody>
-          <a:bodyPr rtlCol="0" anchor="ctr"/>
-          <a:lstStyle/>
-          <a:p>
-            <a:pPr algn="ctr"/>
-          </a:p>
-        </p:txBody>
-      </p:sp>
-      <p:sp>
-        <p:nvSpPr>
-          <p:cNvPr id="5" name="장식"/>
-          <p:cNvSpPr/>
-          <p:nvPr/>
-        </p:nvSpPr>
-        <p:spPr>
-          <a:xfrm rot="4320000">
-            <a:off x="6265243" y="933539"/>
-            <a:ext cx="407365" cy="633679"/>
-          </a:xfrm>
-          <a:prstGeom prst="ellipse">
-            <a:avLst/>
-          </a:prstGeom>
-          <a:solidFill>
-            <a:srgbClr val="EED3E0"/>
-          </a:solidFill>
-          <a:ln>
-            <a:noFill/>
-          </a:ln>
-        </p:spPr>
-        <p:txBody>
-          <a:bodyPr rtlCol="0" anchor="ctr"/>
-          <a:lstStyle/>
-          <a:p>
-            <a:pPr algn="ctr"/>
-          </a:p>
-        </p:txBody>
-      </p:sp>
-      <p:sp>
-        <p:nvSpPr>
-          <p:cNvPr id="6" name="장식"/>
-          <p:cNvSpPr/>
-          <p:nvPr/>
-        </p:nvSpPr>
-        <p:spPr>
-          <a:xfrm rot="8640000">
-            <a:off x="6122739" y="1372119"/>
-            <a:ext cx="407365" cy="633679"/>
-          </a:xfrm>
-          <a:prstGeom prst="ellipse">
-            <a:avLst/>
-          </a:prstGeom>
-          <a:solidFill>
-            <a:srgbClr val="B8618C"/>
-          </a:solidFill>
-          <a:ln>
-            <a:noFill/>
-          </a:ln>
-        </p:spPr>
-        <p:txBody>
-          <a:bodyPr rtlCol="0" anchor="ctr"/>
-          <a:lstStyle/>
-          <a:p>
-            <a:pPr algn="ctr"/>
-          </a:p>
-        </p:txBody>
-      </p:sp>
-      <p:sp>
-        <p:nvSpPr>
-          <p:cNvPr id="7" name="장식"/>
-          <p:cNvSpPr/>
-          <p:nvPr/>
-        </p:nvSpPr>
-        <p:spPr>
-          <a:xfrm rot="12960000">
-            <a:off x="5661590" y="1372119"/>
-            <a:ext cx="407365" cy="633679"/>
-          </a:xfrm>
-          <a:prstGeom prst="ellipse">
-            <a:avLst/>
-          </a:prstGeom>
-          <a:solidFill>
-            <a:srgbClr val="EED3E0"/>
-          </a:solidFill>
-          <a:ln>
-            <a:noFill/>
-          </a:ln>
-        </p:spPr>
-        <p:txBody>
-          <a:bodyPr rtlCol="0" anchor="ctr"/>
-          <a:lstStyle/>
-          <a:p>
-            <a:pPr algn="ctr"/>
-          </a:p>
-        </p:txBody>
-      </p:sp>
-      <p:sp>
-        <p:nvSpPr>
-          <p:cNvPr id="8" name="장식"/>
-          <p:cNvSpPr/>
-          <p:nvPr/>
-        </p:nvSpPr>
-        <p:spPr>
-          <a:xfrm rot="17280000">
-            <a:off x="5519086" y="933539"/>
-            <a:ext cx="407365" cy="633679"/>
-          </a:xfrm>
-          <a:prstGeom prst="ellipse">
-            <a:avLst/>
-          </a:prstGeom>
-          <a:solidFill>
-            <a:srgbClr val="B8618C"/>
-          </a:solidFill>
-          <a:ln>
-            <a:noFill/>
-          </a:ln>
-        </p:spPr>
-        <p:txBody>
-          <a:bodyPr rtlCol="0" anchor="ctr"/>
-          <a:lstStyle/>
-          <a:p>
-            <a:pPr algn="ctr"/>
-          </a:p>
-        </p:txBody>
-      </p:sp>
-      <p:sp>
-        <p:nvSpPr>
-          <p:cNvPr id="9" name="장식"/>
-          <p:cNvSpPr/>
-          <p:nvPr/>
-        </p:nvSpPr>
-        <p:spPr>
-          <a:xfrm>
-            <a:off x="5960059" y="1235811"/>
-            <a:ext cx="271576" cy="271576"/>
-          </a:xfrm>
-          <a:prstGeom prst="ellipse">
-            <a:avLst/>
-          </a:prstGeom>
-          <a:solidFill>
-            <a:srgbClr val="3F8D3F"/>
-          </a:solidFill>
-          <a:ln>
-            <a:noFill/>
-          </a:ln>
-        </p:spPr>
-        <p:txBody>
-          <a:bodyPr rtlCol="0" anchor="ctr"/>
-          <a:lstStyle/>
-          <a:p>
-            <a:pPr algn="ctr"/>
-          </a:p>
-        </p:txBody>
-      </p:sp>
-      <p:sp>
-        <p:nvSpPr>
-          <p:cNvPr id="10" name="장식"/>
-          <p:cNvSpPr/>
-          <p:nvPr/>
-        </p:nvSpPr>
-        <p:spPr>
-          <a:xfrm rot="1200000">
-            <a:off x="5231271" y="1707812"/>
-            <a:ext cx="203682" cy="316839"/>
-          </a:xfrm>
-          <a:prstGeom prst="ellipse">
-            <a:avLst/>
-          </a:prstGeom>
-          <a:solidFill>
-            <a:srgbClr val="B8618C"/>
-          </a:solidFill>
-          <a:ln>
-            <a:noFill/>
-          </a:ln>
-        </p:spPr>
-        <p:txBody>
-          <a:bodyPr rtlCol="0" anchor="ctr"/>
-          <a:lstStyle/>
-          <a:p>
-            <a:pPr algn="ctr"/>
-          </a:p>
-        </p:txBody>
-      </p:sp>
-      <p:sp>
-        <p:nvSpPr>
-          <p:cNvPr id="11" name="장식"/>
-          <p:cNvSpPr/>
-          <p:nvPr/>
-        </p:nvSpPr>
-        <p:spPr>
-          <a:xfrm rot="5520000">
-            <a:off x="5360207" y="1898967"/>
-            <a:ext cx="203682" cy="316839"/>
-          </a:xfrm>
-          <a:prstGeom prst="ellipse">
-            <a:avLst/>
-          </a:prstGeom>
-          <a:solidFill>
-            <a:srgbClr val="EED3E0"/>
-          </a:solidFill>
-          <a:ln>
-            <a:noFill/>
-          </a:ln>
-        </p:spPr>
-        <p:txBody>
-          <a:bodyPr rtlCol="0" anchor="ctr"/>
-          <a:lstStyle/>
-          <a:p>
-            <a:pPr algn="ctr"/>
-          </a:p>
-        </p:txBody>
-      </p:sp>
-      <p:sp>
-        <p:nvSpPr>
-          <p:cNvPr id="12" name="장식"/>
-          <p:cNvSpPr/>
-          <p:nvPr/>
-        </p:nvSpPr>
-        <p:spPr>
-          <a:xfrm rot="9840000">
-            <a:off x="5218251" y="2080662"/>
-            <a:ext cx="203682" cy="316839"/>
-          </a:xfrm>
-          <a:prstGeom prst="ellipse">
-            <a:avLst/>
-          </a:prstGeom>
-          <a:solidFill>
-            <a:srgbClr val="B8618C"/>
-          </a:solidFill>
-          <a:ln>
-            <a:noFill/>
-          </a:ln>
-        </p:spPr>
-        <p:txBody>
-          <a:bodyPr rtlCol="0" anchor="ctr"/>
-          <a:lstStyle/>
-          <a:p>
-            <a:pPr algn="ctr"/>
-          </a:p>
-        </p:txBody>
-      </p:sp>
-      <p:sp>
-        <p:nvSpPr>
-          <p:cNvPr id="13" name="장식"/>
-          <p:cNvSpPr/>
-          <p:nvPr/>
-        </p:nvSpPr>
-        <p:spPr>
-          <a:xfrm rot="14160000">
-            <a:off x="5001581" y="2001801"/>
-            <a:ext cx="203682" cy="316839"/>
-          </a:xfrm>
-          <a:prstGeom prst="ellipse">
-            <a:avLst/>
-          </a:prstGeom>
-          <a:solidFill>
-            <a:srgbClr val="EED3E0"/>
-          </a:solidFill>
-          <a:ln>
-            <a:noFill/>
-          </a:ln>
-        </p:spPr>
-        <p:txBody>
-          <a:bodyPr rtlCol="0" anchor="ctr"/>
-          <a:lstStyle/>
-          <a:p>
-            <a:pPr algn="ctr"/>
-          </a:p>
-        </p:txBody>
-      </p:sp>
-      <p:sp>
-        <p:nvSpPr>
-          <p:cNvPr id="14" name="장식"/>
-          <p:cNvSpPr/>
-          <p:nvPr/>
-        </p:nvSpPr>
-        <p:spPr>
-          <a:xfrm rot="18480000">
-            <a:off x="5009628" y="1771367"/>
-            <a:ext cx="203682" cy="316839"/>
-          </a:xfrm>
-          <a:prstGeom prst="ellipse">
-            <a:avLst/>
-          </a:prstGeom>
-          <a:solidFill>
-            <a:srgbClr val="B8618C"/>
-          </a:solidFill>
-          <a:ln>
-            <a:noFill/>
-          </a:ln>
-        </p:spPr>
-        <p:txBody>
-          <a:bodyPr rtlCol="0" anchor="ctr"/>
-          <a:lstStyle/>
-          <a:p>
-            <a:pPr algn="ctr"/>
-          </a:p>
-        </p:txBody>
-      </p:sp>
-      <p:sp>
-        <p:nvSpPr>
-          <p:cNvPr id="15" name="장식"/>
-          <p:cNvSpPr/>
-          <p:nvPr/>
-        </p:nvSpPr>
-        <p:spPr>
-          <a:xfrm>
-            <a:off x="5198135" y="1982647"/>
-            <a:ext cx="135788" cy="135788"/>
-          </a:xfrm>
-          <a:prstGeom prst="ellipse">
-            <a:avLst/>
-          </a:prstGeom>
-          <a:solidFill>
-            <a:srgbClr val="3F8D3F"/>
-          </a:solidFill>
-          <a:ln>
-            <a:noFill/>
-          </a:ln>
-        </p:spPr>
-        <p:txBody>
-          <a:bodyPr rtlCol="0" anchor="ctr"/>
-          <a:lstStyle/>
-          <a:p>
-            <a:pPr algn="ctr"/>
-          </a:p>
-        </p:txBody>
-      </p:sp>
-      <p:sp>
-        <p:nvSpPr>
-          <p:cNvPr id="16" name="장식"/>
-          <p:cNvSpPr/>
-          <p:nvPr/>
-        </p:nvSpPr>
-        <p:spPr>
-          <a:xfrm rot="2400000">
-            <a:off x="6946022" y="1866696"/>
-            <a:ext cx="171093" cy="266145"/>
-          </a:xfrm>
-          <a:prstGeom prst="ellipse">
-            <a:avLst/>
-          </a:prstGeom>
-          <a:solidFill>
-            <a:srgbClr val="B8618C"/>
-          </a:solidFill>
-          <a:ln>
-            <a:noFill/>
-          </a:ln>
-        </p:spPr>
-        <p:txBody>
-          <a:bodyPr rtlCol="0" anchor="ctr"/>
-          <a:lstStyle/>
-          <a:p>
-            <a:pPr algn="ctr"/>
-          </a:p>
-        </p:txBody>
-      </p:sp>
-      <p:sp>
-        <p:nvSpPr>
-          <p:cNvPr id="17" name="장식"/>
-          <p:cNvSpPr/>
-          <p:nvPr/>
-        </p:nvSpPr>
-        <p:spPr>
-          <a:xfrm rot="6720000">
-            <a:off x="6992878" y="2054626"/>
-            <a:ext cx="171093" cy="266145"/>
-          </a:xfrm>
-          <a:prstGeom prst="ellipse">
-            <a:avLst/>
-          </a:prstGeom>
-          <a:solidFill>
-            <a:srgbClr val="EED3E0"/>
-          </a:solidFill>
-          <a:ln>
-            <a:noFill/>
-          </a:ln>
-        </p:spPr>
-        <p:txBody>
-          <a:bodyPr rtlCol="0" anchor="ctr"/>
-          <a:lstStyle/>
-          <a:p>
-            <a:pPr algn="ctr"/>
-          </a:p>
-        </p:txBody>
-      </p:sp>
-      <p:sp>
-        <p:nvSpPr>
-          <p:cNvPr id="18" name="장식"/>
-          <p:cNvSpPr/>
-          <p:nvPr/>
-        </p:nvSpPr>
-        <p:spPr>
-          <a:xfrm rot="11040000">
-            <a:off x="6828626" y="2157262"/>
-            <a:ext cx="171093" cy="266145"/>
-          </a:xfrm>
-          <a:prstGeom prst="ellipse">
-            <a:avLst/>
-          </a:prstGeom>
-          <a:solidFill>
-            <a:srgbClr val="B8618C"/>
-          </a:solidFill>
-          <a:ln>
-            <a:noFill/>
-          </a:ln>
-        </p:spPr>
-        <p:txBody>
-          <a:bodyPr rtlCol="0" anchor="ctr"/>
-          <a:lstStyle/>
-          <a:p>
-            <a:pPr algn="ctr"/>
-          </a:p>
-        </p:txBody>
-      </p:sp>
-      <p:sp>
-        <p:nvSpPr>
-          <p:cNvPr id="19" name="장식"/>
-          <p:cNvSpPr/>
-          <p:nvPr/>
-        </p:nvSpPr>
-        <p:spPr>
-          <a:xfrm rot="15360000">
-            <a:off x="6680256" y="2032765"/>
-            <a:ext cx="171093" cy="266145"/>
-          </a:xfrm>
-          <a:prstGeom prst="ellipse">
-            <a:avLst/>
-          </a:prstGeom>
-          <a:solidFill>
-            <a:srgbClr val="EED3E0"/>
-          </a:solidFill>
-          <a:ln>
-            <a:noFill/>
-          </a:ln>
-        </p:spPr>
-        <p:txBody>
-          <a:bodyPr rtlCol="0" anchor="ctr"/>
-          <a:lstStyle/>
-          <a:p>
-            <a:pPr algn="ctr"/>
-          </a:p>
-        </p:txBody>
-      </p:sp>
-      <p:sp>
-        <p:nvSpPr>
-          <p:cNvPr id="20" name="장식"/>
-          <p:cNvSpPr/>
-          <p:nvPr/>
-        </p:nvSpPr>
-        <p:spPr>
-          <a:xfrm rot="19680000">
-            <a:off x="6752811" y="1853185"/>
-            <a:ext cx="171093" cy="266145"/>
-          </a:xfrm>
-          <a:prstGeom prst="ellipse">
-            <a:avLst/>
-          </a:prstGeom>
-          <a:solidFill>
-            <a:srgbClr val="B8618C"/>
-          </a:solidFill>
-          <a:ln>
-            <a:noFill/>
-          </a:ln>
-        </p:spPr>
-        <p:txBody>
-          <a:bodyPr rtlCol="0" anchor="ctr"/>
-          <a:lstStyle/>
-          <a:p>
-            <a:pPr algn="ctr"/>
-          </a:p>
-        </p:txBody>
-      </p:sp>
-      <p:sp>
-        <p:nvSpPr>
-          <p:cNvPr id="21" name="장식"/>
-          <p:cNvSpPr/>
-          <p:nvPr/>
-        </p:nvSpPr>
-        <p:spPr>
-          <a:xfrm>
-            <a:off x="6868634" y="2068948"/>
-            <a:ext cx="114062" cy="114062"/>
-          </a:xfrm>
-          <a:prstGeom prst="ellipse">
-            <a:avLst/>
-          </a:prstGeom>
-          <a:solidFill>
-            <a:srgbClr val="3F8D3F"/>
-          </a:solidFill>
-          <a:ln>
-            <a:noFill/>
-          </a:ln>
-        </p:spPr>
-        <p:txBody>
-          <a:bodyPr rtlCol="0" anchor="ctr"/>
-          <a:lstStyle/>
-          <a:p>
-            <a:pPr algn="ctr"/>
-          </a:p>
-        </p:txBody>
-      </p:sp>
+        </p:spPr>
+      </p:pic>
       <p:sp>
         <p:nvSpPr>
           <p:cNvPr id="2" name="Title 1"/>
@@ -3866,8 +3329,8 @@
         </p:nvSpPr>
         <p:spPr>
           <a:xfrm>
-            <a:off x="1463003" y="2263140"/>
-            <a:ext cx="9265688" cy="1371600"/>
+            <a:off x="853418" y="2057400"/>
+            <a:ext cx="6095847" cy="1554480"/>
           </a:xfrm>
         </p:spPr>
         <p:txBody>
@@ -3876,7 +3339,7 @@
           </a:bodyPr>
           <a:lstStyle/>
           <a:p>
-            <a:pPr algn="ctr">
+            <a:pPr algn="l">
               <a:lnSpc>
                 <a:spcPct val="105000"/>
               </a:lnSpc>
@@ -3887,21 +3350,21 @@
                   <a:srgbClr val="7B3759"/>
                 </a:solidFill>
               </a:rPr>
-              <a:t>두 사람이 하나 되는 날</a:t>
-            </a:r>
-          </a:p>
-        </p:txBody>
-      </p:sp>
-      <p:sp>
-        <p:nvSpPr>
-          <p:cNvPr id="22" name="한 줄 문구"/>
+              <a:t>저희 결혼합니다</a:t>
+            </a:r>
+          </a:p>
+        </p:txBody>
+      </p:sp>
+      <p:sp>
+        <p:nvSpPr>
+          <p:cNvPr id="4" name="한 줄 문구"/>
           <p:cNvSpPr txBox="1"/>
           <p:nvPr/>
         </p:nvSpPr>
         <p:spPr>
           <a:xfrm>
-            <a:off x="1463003" y="3726180"/>
-            <a:ext cx="9265688" cy="822960"/>
+            <a:off x="853418" y="3749039"/>
+            <a:ext cx="6095847" cy="822960"/>
           </a:xfrm>
           <a:prstGeom prst="rect">
             <a:avLst/>
@@ -3914,7 +3377,7 @@
           </a:bodyPr>
           <a:lstStyle/>
           <a:p>
-            <a:pPr algn="ctr">
+            <a:pPr algn="l">
               <a:lnSpc>
                 <a:spcPct val="115000"/>
               </a:lnSpc>
@@ -3925,21 +3388,21 @@
                   <a:srgbClr val="7B3759"/>
                 </a:solidFill>
               </a:rPr>
-              <a:t>연꽃처럼 고요한 마음으로 함께하겠습니다</a:t>
-            </a:r>
-          </a:p>
-        </p:txBody>
-      </p:sp>
-      <p:sp>
-        <p:nvSpPr>
-          <p:cNvPr id="23" name="안내 문구"/>
+              <a:t>더운 날 와 주셔서 고맙습니다</a:t>
+            </a:r>
+          </a:p>
+        </p:txBody>
+      </p:sp>
+      <p:sp>
+        <p:nvSpPr>
+          <p:cNvPr id="5" name="안내 문구"/>
           <p:cNvSpPr txBox="1"/>
           <p:nvPr/>
         </p:nvSpPr>
         <p:spPr>
           <a:xfrm>
-            <a:off x="1463003" y="4594860"/>
-            <a:ext cx="9265688" cy="914400"/>
+            <a:off x="853418" y="4617720"/>
+            <a:ext cx="6095847" cy="914400"/>
           </a:xfrm>
           <a:prstGeom prst="rect">
             <a:avLst/>
@@ -3952,7 +3415,7 @@
           </a:bodyPr>
           <a:lstStyle/>
           <a:p>
-            <a:pPr algn="ctr">
+            <a:pPr algn="l">
               <a:lnSpc>
                 <a:spcPct val="115000"/>
               </a:lnSpc>
@@ -3967,7 +3430,7 @@
             </a:r>
           </a:p>
           <a:p>
-            <a:pPr algn="ctr">
+            <a:pPr algn="l">
               <a:lnSpc>
                 <a:spcPct val="115000"/>
               </a:lnSpc>
@@ -3978,7 +3441,7 @@
                   <a:srgbClr val="666666"/>
                 </a:solidFill>
               </a:rPr>
-              <a:t>2026. 00. 00 · 예식장 이름</a:t>
+              <a:t>2027. 00. 00 · 예식장 이름</a:t>
             </a:r>
           </a:p>
         </p:txBody>
@@ -4042,528 +3505,6 @@
       </p:sp>
       <p:sp>
         <p:nvSpPr>
-          <p:cNvPr id="4" name="장식"/>
-          <p:cNvSpPr/>
-          <p:nvPr/>
-        </p:nvSpPr>
-        <p:spPr>
-          <a:xfrm>
-            <a:off x="10879531" y="530352"/>
-            <a:ext cx="246888" cy="384048"/>
-          </a:xfrm>
-          <a:prstGeom prst="ellipse">
-            <a:avLst/>
-          </a:prstGeom>
-          <a:solidFill>
-            <a:srgbClr val="B8618C"/>
-          </a:solidFill>
-          <a:ln>
-            <a:noFill/>
-          </a:ln>
-        </p:spPr>
-        <p:txBody>
-          <a:bodyPr rtlCol="0" anchor="ctr"/>
-          <a:lstStyle/>
-          <a:p>
-            <a:pPr algn="ctr"/>
-          </a:p>
-        </p:txBody>
-      </p:sp>
-      <p:sp>
-        <p:nvSpPr>
-          <p:cNvPr id="5" name="장식"/>
-          <p:cNvSpPr/>
-          <p:nvPr/>
-        </p:nvSpPr>
-        <p:spPr>
-          <a:xfrm rot="4320000">
-            <a:off x="11105639" y="694629"/>
-            <a:ext cx="246888" cy="384048"/>
-          </a:xfrm>
-          <a:prstGeom prst="ellipse">
-            <a:avLst/>
-          </a:prstGeom>
-          <a:solidFill>
-            <a:srgbClr val="EED3E0"/>
-          </a:solidFill>
-          <a:ln>
-            <a:noFill/>
-          </a:ln>
-        </p:spPr>
-        <p:txBody>
-          <a:bodyPr rtlCol="0" anchor="ctr"/>
-          <a:lstStyle/>
-          <a:p>
-            <a:pPr algn="ctr"/>
-          </a:p>
-        </p:txBody>
-      </p:sp>
-      <p:sp>
-        <p:nvSpPr>
-          <p:cNvPr id="6" name="장식"/>
-          <p:cNvSpPr/>
-          <p:nvPr/>
-        </p:nvSpPr>
-        <p:spPr>
-          <a:xfrm rot="8640000">
-            <a:off x="11019273" y="960434"/>
-            <a:ext cx="246888" cy="384048"/>
-          </a:xfrm>
-          <a:prstGeom prst="ellipse">
-            <a:avLst/>
-          </a:prstGeom>
-          <a:solidFill>
-            <a:srgbClr val="B8618C"/>
-          </a:solidFill>
-          <a:ln>
-            <a:noFill/>
-          </a:ln>
-        </p:spPr>
-        <p:txBody>
-          <a:bodyPr rtlCol="0" anchor="ctr"/>
-          <a:lstStyle/>
-          <a:p>
-            <a:pPr algn="ctr"/>
-          </a:p>
-        </p:txBody>
-      </p:sp>
-      <p:sp>
-        <p:nvSpPr>
-          <p:cNvPr id="7" name="장식"/>
-          <p:cNvSpPr/>
-          <p:nvPr/>
-        </p:nvSpPr>
-        <p:spPr>
-          <a:xfrm rot="12960000">
-            <a:off x="10739788" y="960434"/>
-            <a:ext cx="246888" cy="384048"/>
-          </a:xfrm>
-          <a:prstGeom prst="ellipse">
-            <a:avLst/>
-          </a:prstGeom>
-          <a:solidFill>
-            <a:srgbClr val="EED3E0"/>
-          </a:solidFill>
-          <a:ln>
-            <a:noFill/>
-          </a:ln>
-        </p:spPr>
-        <p:txBody>
-          <a:bodyPr rtlCol="0" anchor="ctr"/>
-          <a:lstStyle/>
-          <a:p>
-            <a:pPr algn="ctr"/>
-          </a:p>
-        </p:txBody>
-      </p:sp>
-      <p:sp>
-        <p:nvSpPr>
-          <p:cNvPr id="8" name="장식"/>
-          <p:cNvSpPr/>
-          <p:nvPr/>
-        </p:nvSpPr>
-        <p:spPr>
-          <a:xfrm rot="17280000">
-            <a:off x="10653423" y="694629"/>
-            <a:ext cx="246888" cy="384048"/>
-          </a:xfrm>
-          <a:prstGeom prst="ellipse">
-            <a:avLst/>
-          </a:prstGeom>
-          <a:solidFill>
-            <a:srgbClr val="B8618C"/>
-          </a:solidFill>
-          <a:ln>
-            <a:noFill/>
-          </a:ln>
-        </p:spPr>
-        <p:txBody>
-          <a:bodyPr rtlCol="0" anchor="ctr"/>
-          <a:lstStyle/>
-          <a:p>
-            <a:pPr algn="ctr"/>
-          </a:p>
-        </p:txBody>
-      </p:sp>
-      <p:sp>
-        <p:nvSpPr>
-          <p:cNvPr id="9" name="장식"/>
-          <p:cNvSpPr/>
-          <p:nvPr/>
-        </p:nvSpPr>
-        <p:spPr>
-          <a:xfrm>
-            <a:off x="10920679" y="877824"/>
-            <a:ext cx="164592" cy="164592"/>
-          </a:xfrm>
-          <a:prstGeom prst="ellipse">
-            <a:avLst/>
-          </a:prstGeom>
-          <a:solidFill>
-            <a:srgbClr val="3F8D3F"/>
-          </a:solidFill>
-          <a:ln>
-            <a:noFill/>
-          </a:ln>
-        </p:spPr>
-        <p:txBody>
-          <a:bodyPr rtlCol="0" anchor="ctr"/>
-          <a:lstStyle/>
-          <a:p>
-            <a:pPr algn="ctr"/>
-          </a:p>
-        </p:txBody>
-      </p:sp>
-      <p:sp>
-        <p:nvSpPr>
-          <p:cNvPr id="10" name="장식"/>
-          <p:cNvSpPr/>
-          <p:nvPr/>
-        </p:nvSpPr>
-        <p:spPr>
-          <a:xfrm rot="1200000">
-            <a:off x="10478989" y="1163884"/>
-            <a:ext cx="123444" cy="192024"/>
-          </a:xfrm>
-          <a:prstGeom prst="ellipse">
-            <a:avLst/>
-          </a:prstGeom>
-          <a:solidFill>
-            <a:srgbClr val="B8618C"/>
-          </a:solidFill>
-          <a:ln>
-            <a:noFill/>
-          </a:ln>
-        </p:spPr>
-        <p:txBody>
-          <a:bodyPr rtlCol="0" anchor="ctr"/>
-          <a:lstStyle/>
-          <a:p>
-            <a:pPr algn="ctr"/>
-          </a:p>
-        </p:txBody>
-      </p:sp>
-      <p:sp>
-        <p:nvSpPr>
-          <p:cNvPr id="11" name="장식"/>
-          <p:cNvSpPr/>
-          <p:nvPr/>
-        </p:nvSpPr>
-        <p:spPr>
-          <a:xfrm rot="5520000">
-            <a:off x="10557132" y="1279736"/>
-            <a:ext cx="123444" cy="192024"/>
-          </a:xfrm>
-          <a:prstGeom prst="ellipse">
-            <a:avLst/>
-          </a:prstGeom>
-          <a:solidFill>
-            <a:srgbClr val="EED3E0"/>
-          </a:solidFill>
-          <a:ln>
-            <a:noFill/>
-          </a:ln>
-        </p:spPr>
-        <p:txBody>
-          <a:bodyPr rtlCol="0" anchor="ctr"/>
-          <a:lstStyle/>
-          <a:p>
-            <a:pPr algn="ctr"/>
-          </a:p>
-        </p:txBody>
-      </p:sp>
-      <p:sp>
-        <p:nvSpPr>
-          <p:cNvPr id="12" name="장식"/>
-          <p:cNvSpPr/>
-          <p:nvPr/>
-        </p:nvSpPr>
-        <p:spPr>
-          <a:xfrm rot="9840000">
-            <a:off x="10471098" y="1389855"/>
-            <a:ext cx="123444" cy="192024"/>
-          </a:xfrm>
-          <a:prstGeom prst="ellipse">
-            <a:avLst/>
-          </a:prstGeom>
-          <a:solidFill>
-            <a:srgbClr val="B8618C"/>
-          </a:solidFill>
-          <a:ln>
-            <a:noFill/>
-          </a:ln>
-        </p:spPr>
-        <p:txBody>
-          <a:bodyPr rtlCol="0" anchor="ctr"/>
-          <a:lstStyle/>
-          <a:p>
-            <a:pPr algn="ctr"/>
-          </a:p>
-        </p:txBody>
-      </p:sp>
-      <p:sp>
-        <p:nvSpPr>
-          <p:cNvPr id="13" name="장식"/>
-          <p:cNvSpPr/>
-          <p:nvPr/>
-        </p:nvSpPr>
-        <p:spPr>
-          <a:xfrm rot="14160000">
-            <a:off x="10339783" y="1342060"/>
-            <a:ext cx="123444" cy="192024"/>
-          </a:xfrm>
-          <a:prstGeom prst="ellipse">
-            <a:avLst/>
-          </a:prstGeom>
-          <a:solidFill>
-            <a:srgbClr val="EED3E0"/>
-          </a:solidFill>
-          <a:ln>
-            <a:noFill/>
-          </a:ln>
-        </p:spPr>
-        <p:txBody>
-          <a:bodyPr rtlCol="0" anchor="ctr"/>
-          <a:lstStyle/>
-          <a:p>
-            <a:pPr algn="ctr"/>
-          </a:p>
-        </p:txBody>
-      </p:sp>
-      <p:sp>
-        <p:nvSpPr>
-          <p:cNvPr id="14" name="장식"/>
-          <p:cNvSpPr/>
-          <p:nvPr/>
-        </p:nvSpPr>
-        <p:spPr>
-          <a:xfrm rot="18480000">
-            <a:off x="10344660" y="1202403"/>
-            <a:ext cx="123444" cy="192024"/>
-          </a:xfrm>
-          <a:prstGeom prst="ellipse">
-            <a:avLst/>
-          </a:prstGeom>
-          <a:solidFill>
-            <a:srgbClr val="B8618C"/>
-          </a:solidFill>
-          <a:ln>
-            <a:noFill/>
-          </a:ln>
-        </p:spPr>
-        <p:txBody>
-          <a:bodyPr rtlCol="0" anchor="ctr"/>
-          <a:lstStyle/>
-          <a:p>
-            <a:pPr algn="ctr"/>
-          </a:p>
-        </p:txBody>
-      </p:sp>
-      <p:sp>
-        <p:nvSpPr>
-          <p:cNvPr id="15" name="장식"/>
-          <p:cNvSpPr/>
-          <p:nvPr/>
-        </p:nvSpPr>
-        <p:spPr>
-          <a:xfrm>
-            <a:off x="10458907" y="1330452"/>
-            <a:ext cx="82296" cy="82296"/>
-          </a:xfrm>
-          <a:prstGeom prst="ellipse">
-            <a:avLst/>
-          </a:prstGeom>
-          <a:solidFill>
-            <a:srgbClr val="3F8D3F"/>
-          </a:solidFill>
-          <a:ln>
-            <a:noFill/>
-          </a:ln>
-        </p:spPr>
-        <p:txBody>
-          <a:bodyPr rtlCol="0" anchor="ctr"/>
-          <a:lstStyle/>
-          <a:p>
-            <a:pPr algn="ctr"/>
-          </a:p>
-        </p:txBody>
-      </p:sp>
-      <p:sp>
-        <p:nvSpPr>
-          <p:cNvPr id="16" name="장식"/>
-          <p:cNvSpPr/>
-          <p:nvPr/>
-        </p:nvSpPr>
-        <p:spPr>
-          <a:xfrm rot="2400000">
-            <a:off x="11518232" y="1260178"/>
-            <a:ext cx="103692" cy="161300"/>
-          </a:xfrm>
-          <a:prstGeom prst="ellipse">
-            <a:avLst/>
-          </a:prstGeom>
-          <a:solidFill>
-            <a:srgbClr val="B8618C"/>
-          </a:solidFill>
-          <a:ln>
-            <a:noFill/>
-          </a:ln>
-        </p:spPr>
-        <p:txBody>
-          <a:bodyPr rtlCol="0" anchor="ctr"/>
-          <a:lstStyle/>
-          <a:p>
-            <a:pPr algn="ctr"/>
-          </a:p>
-        </p:txBody>
-      </p:sp>
-      <p:sp>
-        <p:nvSpPr>
-          <p:cNvPr id="17" name="장식"/>
-          <p:cNvSpPr/>
-          <p:nvPr/>
-        </p:nvSpPr>
-        <p:spPr>
-          <a:xfrm rot="6720000">
-            <a:off x="11546630" y="1374075"/>
-            <a:ext cx="103692" cy="161300"/>
-          </a:xfrm>
-          <a:prstGeom prst="ellipse">
-            <a:avLst/>
-          </a:prstGeom>
-          <a:solidFill>
-            <a:srgbClr val="EED3E0"/>
-          </a:solidFill>
-          <a:ln>
-            <a:noFill/>
-          </a:ln>
-        </p:spPr>
-        <p:txBody>
-          <a:bodyPr rtlCol="0" anchor="ctr"/>
-          <a:lstStyle/>
-          <a:p>
-            <a:pPr algn="ctr"/>
-          </a:p>
-        </p:txBody>
-      </p:sp>
-      <p:sp>
-        <p:nvSpPr>
-          <p:cNvPr id="18" name="장식"/>
-          <p:cNvSpPr/>
-          <p:nvPr/>
-        </p:nvSpPr>
-        <p:spPr>
-          <a:xfrm rot="11040000">
-            <a:off x="11447083" y="1436279"/>
-            <a:ext cx="103692" cy="161300"/>
-          </a:xfrm>
-          <a:prstGeom prst="ellipse">
-            <a:avLst/>
-          </a:prstGeom>
-          <a:solidFill>
-            <a:srgbClr val="B8618C"/>
-          </a:solidFill>
-          <a:ln>
-            <a:noFill/>
-          </a:ln>
-        </p:spPr>
-        <p:txBody>
-          <a:bodyPr rtlCol="0" anchor="ctr"/>
-          <a:lstStyle/>
-          <a:p>
-            <a:pPr algn="ctr"/>
-          </a:p>
-        </p:txBody>
-      </p:sp>
-      <p:sp>
-        <p:nvSpPr>
-          <p:cNvPr id="19" name="장식"/>
-          <p:cNvSpPr/>
-          <p:nvPr/>
-        </p:nvSpPr>
-        <p:spPr>
-          <a:xfrm rot="15360000">
-            <a:off x="11357162" y="1360826"/>
-            <a:ext cx="103692" cy="161300"/>
-          </a:xfrm>
-          <a:prstGeom prst="ellipse">
-            <a:avLst/>
-          </a:prstGeom>
-          <a:solidFill>
-            <a:srgbClr val="EED3E0"/>
-          </a:solidFill>
-          <a:ln>
-            <a:noFill/>
-          </a:ln>
-        </p:spPr>
-        <p:txBody>
-          <a:bodyPr rtlCol="0" anchor="ctr"/>
-          <a:lstStyle/>
-          <a:p>
-            <a:pPr algn="ctr"/>
-          </a:p>
-        </p:txBody>
-      </p:sp>
-      <p:sp>
-        <p:nvSpPr>
-          <p:cNvPr id="20" name="장식"/>
-          <p:cNvSpPr/>
-          <p:nvPr/>
-        </p:nvSpPr>
-        <p:spPr>
-          <a:xfrm rot="19680000">
-            <a:off x="11401134" y="1251990"/>
-            <a:ext cx="103692" cy="161300"/>
-          </a:xfrm>
-          <a:prstGeom prst="ellipse">
-            <a:avLst/>
-          </a:prstGeom>
-          <a:solidFill>
-            <a:srgbClr val="B8618C"/>
-          </a:solidFill>
-          <a:ln>
-            <a:noFill/>
-          </a:ln>
-        </p:spPr>
-        <p:txBody>
-          <a:bodyPr rtlCol="0" anchor="ctr"/>
-          <a:lstStyle/>
-          <a:p>
-            <a:pPr algn="ctr"/>
-          </a:p>
-        </p:txBody>
-      </p:sp>
-      <p:sp>
-        <p:nvSpPr>
-          <p:cNvPr id="21" name="장식"/>
-          <p:cNvSpPr/>
-          <p:nvPr/>
-        </p:nvSpPr>
-        <p:spPr>
-          <a:xfrm>
-            <a:off x="11471330" y="1382755"/>
-            <a:ext cx="69128" cy="69128"/>
-          </a:xfrm>
-          <a:prstGeom prst="ellipse">
-            <a:avLst/>
-          </a:prstGeom>
-          <a:solidFill>
-            <a:srgbClr val="3F8D3F"/>
-          </a:solidFill>
-          <a:ln>
-            <a:noFill/>
-          </a:ln>
-        </p:spPr>
-        <p:txBody>
-          <a:bodyPr rtlCol="0" anchor="ctr"/>
-          <a:lstStyle/>
-          <a:p>
-            <a:pPr algn="ctr"/>
-          </a:p>
-        </p:txBody>
-      </p:sp>
-      <p:sp>
-        <p:nvSpPr>
           <p:cNvPr id="2" name="Title 1"/>
           <p:cNvSpPr>
             <a:spLocks noGrp="1"/>
@@ -4602,7 +3543,7 @@
       </p:sp>
       <p:sp>
         <p:nvSpPr>
-          <p:cNvPr id="22" name="사진 자리"/>
+          <p:cNvPr id="4" name="사진 자리"/>
           <p:cNvSpPr/>
           <p:nvPr/>
         </p:nvSpPr>
@@ -4648,7 +3589,7 @@
       </p:sp>
       <p:sp>
         <p:nvSpPr>
-          <p:cNvPr id="23" name="TextBox 22"/>
+          <p:cNvPr id="5" name="TextBox 4"/>
           <p:cNvSpPr txBox="1"/>
           <p:nvPr/>
         </p:nvSpPr>
@@ -4686,7 +3627,7 @@
       </p:sp>
       <p:sp>
         <p:nvSpPr>
-          <p:cNvPr id="24" name="TextBox 23"/>
+          <p:cNvPr id="6" name="TextBox 5"/>
           <p:cNvSpPr txBox="1"/>
           <p:nvPr/>
         </p:nvSpPr>
@@ -4754,7 +3695,7 @@
       </p:sp>
       <p:sp>
         <p:nvSpPr>
-          <p:cNvPr id="25" name="사진 자리"/>
+          <p:cNvPr id="7" name="사진 자리"/>
           <p:cNvSpPr/>
           <p:nvPr/>
         </p:nvSpPr>
@@ -4800,7 +3741,7 @@
       </p:sp>
       <p:sp>
         <p:nvSpPr>
-          <p:cNvPr id="26" name="TextBox 25"/>
+          <p:cNvPr id="8" name="TextBox 7"/>
           <p:cNvSpPr txBox="1"/>
           <p:nvPr/>
         </p:nvSpPr>
@@ -4838,7 +3779,7 @@
       </p:sp>
       <p:sp>
         <p:nvSpPr>
-          <p:cNvPr id="27" name="TextBox 26"/>
+          <p:cNvPr id="9" name="TextBox 8"/>
           <p:cNvSpPr txBox="1"/>
           <p:nvPr/>
         </p:nvSpPr>
@@ -4963,528 +3904,6 @@
       </p:sp>
       <p:sp>
         <p:nvSpPr>
-          <p:cNvPr id="4" name="장식"/>
-          <p:cNvSpPr/>
-          <p:nvPr/>
-        </p:nvSpPr>
-        <p:spPr>
-          <a:xfrm>
-            <a:off x="10879531" y="530352"/>
-            <a:ext cx="246888" cy="384048"/>
-          </a:xfrm>
-          <a:prstGeom prst="ellipse">
-            <a:avLst/>
-          </a:prstGeom>
-          <a:solidFill>
-            <a:srgbClr val="B8618C"/>
-          </a:solidFill>
-          <a:ln>
-            <a:noFill/>
-          </a:ln>
-        </p:spPr>
-        <p:txBody>
-          <a:bodyPr rtlCol="0" anchor="ctr"/>
-          <a:lstStyle/>
-          <a:p>
-            <a:pPr algn="ctr"/>
-          </a:p>
-        </p:txBody>
-      </p:sp>
-      <p:sp>
-        <p:nvSpPr>
-          <p:cNvPr id="5" name="장식"/>
-          <p:cNvSpPr/>
-          <p:nvPr/>
-        </p:nvSpPr>
-        <p:spPr>
-          <a:xfrm rot="4320000">
-            <a:off x="11105639" y="694629"/>
-            <a:ext cx="246888" cy="384048"/>
-          </a:xfrm>
-          <a:prstGeom prst="ellipse">
-            <a:avLst/>
-          </a:prstGeom>
-          <a:solidFill>
-            <a:srgbClr val="EED3E0"/>
-          </a:solidFill>
-          <a:ln>
-            <a:noFill/>
-          </a:ln>
-        </p:spPr>
-        <p:txBody>
-          <a:bodyPr rtlCol="0" anchor="ctr"/>
-          <a:lstStyle/>
-          <a:p>
-            <a:pPr algn="ctr"/>
-          </a:p>
-        </p:txBody>
-      </p:sp>
-      <p:sp>
-        <p:nvSpPr>
-          <p:cNvPr id="6" name="장식"/>
-          <p:cNvSpPr/>
-          <p:nvPr/>
-        </p:nvSpPr>
-        <p:spPr>
-          <a:xfrm rot="8640000">
-            <a:off x="11019273" y="960434"/>
-            <a:ext cx="246888" cy="384048"/>
-          </a:xfrm>
-          <a:prstGeom prst="ellipse">
-            <a:avLst/>
-          </a:prstGeom>
-          <a:solidFill>
-            <a:srgbClr val="B8618C"/>
-          </a:solidFill>
-          <a:ln>
-            <a:noFill/>
-          </a:ln>
-        </p:spPr>
-        <p:txBody>
-          <a:bodyPr rtlCol="0" anchor="ctr"/>
-          <a:lstStyle/>
-          <a:p>
-            <a:pPr algn="ctr"/>
-          </a:p>
-        </p:txBody>
-      </p:sp>
-      <p:sp>
-        <p:nvSpPr>
-          <p:cNvPr id="7" name="장식"/>
-          <p:cNvSpPr/>
-          <p:nvPr/>
-        </p:nvSpPr>
-        <p:spPr>
-          <a:xfrm rot="12960000">
-            <a:off x="10739788" y="960434"/>
-            <a:ext cx="246888" cy="384048"/>
-          </a:xfrm>
-          <a:prstGeom prst="ellipse">
-            <a:avLst/>
-          </a:prstGeom>
-          <a:solidFill>
-            <a:srgbClr val="EED3E0"/>
-          </a:solidFill>
-          <a:ln>
-            <a:noFill/>
-          </a:ln>
-        </p:spPr>
-        <p:txBody>
-          <a:bodyPr rtlCol="0" anchor="ctr"/>
-          <a:lstStyle/>
-          <a:p>
-            <a:pPr algn="ctr"/>
-          </a:p>
-        </p:txBody>
-      </p:sp>
-      <p:sp>
-        <p:nvSpPr>
-          <p:cNvPr id="8" name="장식"/>
-          <p:cNvSpPr/>
-          <p:nvPr/>
-        </p:nvSpPr>
-        <p:spPr>
-          <a:xfrm rot="17280000">
-            <a:off x="10653423" y="694629"/>
-            <a:ext cx="246888" cy="384048"/>
-          </a:xfrm>
-          <a:prstGeom prst="ellipse">
-            <a:avLst/>
-          </a:prstGeom>
-          <a:solidFill>
-            <a:srgbClr val="B8618C"/>
-          </a:solidFill>
-          <a:ln>
-            <a:noFill/>
-          </a:ln>
-        </p:spPr>
-        <p:txBody>
-          <a:bodyPr rtlCol="0" anchor="ctr"/>
-          <a:lstStyle/>
-          <a:p>
-            <a:pPr algn="ctr"/>
-          </a:p>
-        </p:txBody>
-      </p:sp>
-      <p:sp>
-        <p:nvSpPr>
-          <p:cNvPr id="9" name="장식"/>
-          <p:cNvSpPr/>
-          <p:nvPr/>
-        </p:nvSpPr>
-        <p:spPr>
-          <a:xfrm>
-            <a:off x="10920679" y="877824"/>
-            <a:ext cx="164592" cy="164592"/>
-          </a:xfrm>
-          <a:prstGeom prst="ellipse">
-            <a:avLst/>
-          </a:prstGeom>
-          <a:solidFill>
-            <a:srgbClr val="3F8D3F"/>
-          </a:solidFill>
-          <a:ln>
-            <a:noFill/>
-          </a:ln>
-        </p:spPr>
-        <p:txBody>
-          <a:bodyPr rtlCol="0" anchor="ctr"/>
-          <a:lstStyle/>
-          <a:p>
-            <a:pPr algn="ctr"/>
-          </a:p>
-        </p:txBody>
-      </p:sp>
-      <p:sp>
-        <p:nvSpPr>
-          <p:cNvPr id="10" name="장식"/>
-          <p:cNvSpPr/>
-          <p:nvPr/>
-        </p:nvSpPr>
-        <p:spPr>
-          <a:xfrm rot="1200000">
-            <a:off x="10478989" y="1163884"/>
-            <a:ext cx="123444" cy="192024"/>
-          </a:xfrm>
-          <a:prstGeom prst="ellipse">
-            <a:avLst/>
-          </a:prstGeom>
-          <a:solidFill>
-            <a:srgbClr val="B8618C"/>
-          </a:solidFill>
-          <a:ln>
-            <a:noFill/>
-          </a:ln>
-        </p:spPr>
-        <p:txBody>
-          <a:bodyPr rtlCol="0" anchor="ctr"/>
-          <a:lstStyle/>
-          <a:p>
-            <a:pPr algn="ctr"/>
-          </a:p>
-        </p:txBody>
-      </p:sp>
-      <p:sp>
-        <p:nvSpPr>
-          <p:cNvPr id="11" name="장식"/>
-          <p:cNvSpPr/>
-          <p:nvPr/>
-        </p:nvSpPr>
-        <p:spPr>
-          <a:xfrm rot="5520000">
-            <a:off x="10557132" y="1279736"/>
-            <a:ext cx="123444" cy="192024"/>
-          </a:xfrm>
-          <a:prstGeom prst="ellipse">
-            <a:avLst/>
-          </a:prstGeom>
-          <a:solidFill>
-            <a:srgbClr val="EED3E0"/>
-          </a:solidFill>
-          <a:ln>
-            <a:noFill/>
-          </a:ln>
-        </p:spPr>
-        <p:txBody>
-          <a:bodyPr rtlCol="0" anchor="ctr"/>
-          <a:lstStyle/>
-          <a:p>
-            <a:pPr algn="ctr"/>
-          </a:p>
-        </p:txBody>
-      </p:sp>
-      <p:sp>
-        <p:nvSpPr>
-          <p:cNvPr id="12" name="장식"/>
-          <p:cNvSpPr/>
-          <p:nvPr/>
-        </p:nvSpPr>
-        <p:spPr>
-          <a:xfrm rot="9840000">
-            <a:off x="10471098" y="1389855"/>
-            <a:ext cx="123444" cy="192024"/>
-          </a:xfrm>
-          <a:prstGeom prst="ellipse">
-            <a:avLst/>
-          </a:prstGeom>
-          <a:solidFill>
-            <a:srgbClr val="B8618C"/>
-          </a:solidFill>
-          <a:ln>
-            <a:noFill/>
-          </a:ln>
-        </p:spPr>
-        <p:txBody>
-          <a:bodyPr rtlCol="0" anchor="ctr"/>
-          <a:lstStyle/>
-          <a:p>
-            <a:pPr algn="ctr"/>
-          </a:p>
-        </p:txBody>
-      </p:sp>
-      <p:sp>
-        <p:nvSpPr>
-          <p:cNvPr id="13" name="장식"/>
-          <p:cNvSpPr/>
-          <p:nvPr/>
-        </p:nvSpPr>
-        <p:spPr>
-          <a:xfrm rot="14160000">
-            <a:off x="10339783" y="1342060"/>
-            <a:ext cx="123444" cy="192024"/>
-          </a:xfrm>
-          <a:prstGeom prst="ellipse">
-            <a:avLst/>
-          </a:prstGeom>
-          <a:solidFill>
-            <a:srgbClr val="EED3E0"/>
-          </a:solidFill>
-          <a:ln>
-            <a:noFill/>
-          </a:ln>
-        </p:spPr>
-        <p:txBody>
-          <a:bodyPr rtlCol="0" anchor="ctr"/>
-          <a:lstStyle/>
-          <a:p>
-            <a:pPr algn="ctr"/>
-          </a:p>
-        </p:txBody>
-      </p:sp>
-      <p:sp>
-        <p:nvSpPr>
-          <p:cNvPr id="14" name="장식"/>
-          <p:cNvSpPr/>
-          <p:nvPr/>
-        </p:nvSpPr>
-        <p:spPr>
-          <a:xfrm rot="18480000">
-            <a:off x="10344660" y="1202403"/>
-            <a:ext cx="123444" cy="192024"/>
-          </a:xfrm>
-          <a:prstGeom prst="ellipse">
-            <a:avLst/>
-          </a:prstGeom>
-          <a:solidFill>
-            <a:srgbClr val="B8618C"/>
-          </a:solidFill>
-          <a:ln>
-            <a:noFill/>
-          </a:ln>
-        </p:spPr>
-        <p:txBody>
-          <a:bodyPr rtlCol="0" anchor="ctr"/>
-          <a:lstStyle/>
-          <a:p>
-            <a:pPr algn="ctr"/>
-          </a:p>
-        </p:txBody>
-      </p:sp>
-      <p:sp>
-        <p:nvSpPr>
-          <p:cNvPr id="15" name="장식"/>
-          <p:cNvSpPr/>
-          <p:nvPr/>
-        </p:nvSpPr>
-        <p:spPr>
-          <a:xfrm>
-            <a:off x="10458907" y="1330452"/>
-            <a:ext cx="82296" cy="82296"/>
-          </a:xfrm>
-          <a:prstGeom prst="ellipse">
-            <a:avLst/>
-          </a:prstGeom>
-          <a:solidFill>
-            <a:srgbClr val="3F8D3F"/>
-          </a:solidFill>
-          <a:ln>
-            <a:noFill/>
-          </a:ln>
-        </p:spPr>
-        <p:txBody>
-          <a:bodyPr rtlCol="0" anchor="ctr"/>
-          <a:lstStyle/>
-          <a:p>
-            <a:pPr algn="ctr"/>
-          </a:p>
-        </p:txBody>
-      </p:sp>
-      <p:sp>
-        <p:nvSpPr>
-          <p:cNvPr id="16" name="장식"/>
-          <p:cNvSpPr/>
-          <p:nvPr/>
-        </p:nvSpPr>
-        <p:spPr>
-          <a:xfrm rot="2400000">
-            <a:off x="11518232" y="1260178"/>
-            <a:ext cx="103692" cy="161300"/>
-          </a:xfrm>
-          <a:prstGeom prst="ellipse">
-            <a:avLst/>
-          </a:prstGeom>
-          <a:solidFill>
-            <a:srgbClr val="B8618C"/>
-          </a:solidFill>
-          <a:ln>
-            <a:noFill/>
-          </a:ln>
-        </p:spPr>
-        <p:txBody>
-          <a:bodyPr rtlCol="0" anchor="ctr"/>
-          <a:lstStyle/>
-          <a:p>
-            <a:pPr algn="ctr"/>
-          </a:p>
-        </p:txBody>
-      </p:sp>
-      <p:sp>
-        <p:nvSpPr>
-          <p:cNvPr id="17" name="장식"/>
-          <p:cNvSpPr/>
-          <p:nvPr/>
-        </p:nvSpPr>
-        <p:spPr>
-          <a:xfrm rot="6720000">
-            <a:off x="11546630" y="1374075"/>
-            <a:ext cx="103692" cy="161300"/>
-          </a:xfrm>
-          <a:prstGeom prst="ellipse">
-            <a:avLst/>
-          </a:prstGeom>
-          <a:solidFill>
-            <a:srgbClr val="EED3E0"/>
-          </a:solidFill>
-          <a:ln>
-            <a:noFill/>
-          </a:ln>
-        </p:spPr>
-        <p:txBody>
-          <a:bodyPr rtlCol="0" anchor="ctr"/>
-          <a:lstStyle/>
-          <a:p>
-            <a:pPr algn="ctr"/>
-          </a:p>
-        </p:txBody>
-      </p:sp>
-      <p:sp>
-        <p:nvSpPr>
-          <p:cNvPr id="18" name="장식"/>
-          <p:cNvSpPr/>
-          <p:nvPr/>
-        </p:nvSpPr>
-        <p:spPr>
-          <a:xfrm rot="11040000">
-            <a:off x="11447083" y="1436279"/>
-            <a:ext cx="103692" cy="161300"/>
-          </a:xfrm>
-          <a:prstGeom prst="ellipse">
-            <a:avLst/>
-          </a:prstGeom>
-          <a:solidFill>
-            <a:srgbClr val="B8618C"/>
-          </a:solidFill>
-          <a:ln>
-            <a:noFill/>
-          </a:ln>
-        </p:spPr>
-        <p:txBody>
-          <a:bodyPr rtlCol="0" anchor="ctr"/>
-          <a:lstStyle/>
-          <a:p>
-            <a:pPr algn="ctr"/>
-          </a:p>
-        </p:txBody>
-      </p:sp>
-      <p:sp>
-        <p:nvSpPr>
-          <p:cNvPr id="19" name="장식"/>
-          <p:cNvSpPr/>
-          <p:nvPr/>
-        </p:nvSpPr>
-        <p:spPr>
-          <a:xfrm rot="15360000">
-            <a:off x="11357162" y="1360826"/>
-            <a:ext cx="103692" cy="161300"/>
-          </a:xfrm>
-          <a:prstGeom prst="ellipse">
-            <a:avLst/>
-          </a:prstGeom>
-          <a:solidFill>
-            <a:srgbClr val="EED3E0"/>
-          </a:solidFill>
-          <a:ln>
-            <a:noFill/>
-          </a:ln>
-        </p:spPr>
-        <p:txBody>
-          <a:bodyPr rtlCol="0" anchor="ctr"/>
-          <a:lstStyle/>
-          <a:p>
-            <a:pPr algn="ctr"/>
-          </a:p>
-        </p:txBody>
-      </p:sp>
-      <p:sp>
-        <p:nvSpPr>
-          <p:cNvPr id="20" name="장식"/>
-          <p:cNvSpPr/>
-          <p:nvPr/>
-        </p:nvSpPr>
-        <p:spPr>
-          <a:xfrm rot="19680000">
-            <a:off x="11401134" y="1251990"/>
-            <a:ext cx="103692" cy="161300"/>
-          </a:xfrm>
-          <a:prstGeom prst="ellipse">
-            <a:avLst/>
-          </a:prstGeom>
-          <a:solidFill>
-            <a:srgbClr val="B8618C"/>
-          </a:solidFill>
-          <a:ln>
-            <a:noFill/>
-          </a:ln>
-        </p:spPr>
-        <p:txBody>
-          <a:bodyPr rtlCol="0" anchor="ctr"/>
-          <a:lstStyle/>
-          <a:p>
-            <a:pPr algn="ctr"/>
-          </a:p>
-        </p:txBody>
-      </p:sp>
-      <p:sp>
-        <p:nvSpPr>
-          <p:cNvPr id="21" name="장식"/>
-          <p:cNvSpPr/>
-          <p:nvPr/>
-        </p:nvSpPr>
-        <p:spPr>
-          <a:xfrm>
-            <a:off x="11471330" y="1382755"/>
-            <a:ext cx="69128" cy="69128"/>
-          </a:xfrm>
-          <a:prstGeom prst="ellipse">
-            <a:avLst/>
-          </a:prstGeom>
-          <a:solidFill>
-            <a:srgbClr val="3F8D3F"/>
-          </a:solidFill>
-          <a:ln>
-            <a:noFill/>
-          </a:ln>
-        </p:spPr>
-        <p:txBody>
-          <a:bodyPr rtlCol="0" anchor="ctr"/>
-          <a:lstStyle/>
-          <a:p>
-            <a:pPr algn="ctr"/>
-          </a:p>
-        </p:txBody>
-      </p:sp>
-      <p:sp>
-        <p:nvSpPr>
           <p:cNvPr id="2" name="Title 1"/>
           <p:cNvSpPr>
             <a:spLocks noGrp="1"/>
@@ -5523,7 +3942,7 @@
       </p:sp>
       <p:sp>
         <p:nvSpPr>
-          <p:cNvPr id="22" name="감사 글 칸"/>
+          <p:cNvPr id="4" name="감사 글 칸"/>
           <p:cNvSpPr/>
           <p:nvPr/>
         </p:nvSpPr>
@@ -5556,7 +3975,7 @@
       </p:sp>
       <p:sp>
         <p:nvSpPr>
-          <p:cNvPr id="23" name="감사 글"/>
+          <p:cNvPr id="5" name="감사 글"/>
           <p:cNvSpPr txBox="1"/>
           <p:nvPr/>
         </p:nvSpPr>
@@ -5587,7 +4006,7 @@
                   <a:srgbClr val="2B2B2B"/>
                 </a:solidFill>
               </a:rPr>
-              <a:t>바쁘신 중에도 귀한 걸음 해 주셔서 감사합니다.</a:t>
+              <a:t>바쁘신 중에 와 주셔서 고맙습니다.</a:t>
             </a:r>
           </a:p>
           <a:p>
@@ -5617,7 +4036,7 @@
                   <a:srgbClr val="2B2B2B"/>
                 </a:solidFill>
               </a:rPr>
-              <a:t>보내 주신 축복 잊지 않고</a:t>
+              <a:t>보내 주신 마음 잊지 않고</a:t>
             </a:r>
           </a:p>
           <a:p>
@@ -5632,7 +4051,7 @@
                   <a:srgbClr val="2B2B2B"/>
                 </a:solidFill>
               </a:rPr>
-              <a:t>서로 아끼며 예쁘게 살겠습니다.</a:t>
+              <a:t>잘 살겠습니다.</a:t>
             </a:r>
           </a:p>
           <a:p>
@@ -5726,528 +4145,6 @@
       </p:sp>
       <p:sp>
         <p:nvSpPr>
-          <p:cNvPr id="4" name="장식"/>
-          <p:cNvSpPr/>
-          <p:nvPr/>
-        </p:nvSpPr>
-        <p:spPr>
-          <a:xfrm>
-            <a:off x="10879531" y="530352"/>
-            <a:ext cx="246888" cy="384048"/>
-          </a:xfrm>
-          <a:prstGeom prst="ellipse">
-            <a:avLst/>
-          </a:prstGeom>
-          <a:solidFill>
-            <a:srgbClr val="B8618C"/>
-          </a:solidFill>
-          <a:ln>
-            <a:noFill/>
-          </a:ln>
-        </p:spPr>
-        <p:txBody>
-          <a:bodyPr rtlCol="0" anchor="ctr"/>
-          <a:lstStyle/>
-          <a:p>
-            <a:pPr algn="ctr"/>
-          </a:p>
-        </p:txBody>
-      </p:sp>
-      <p:sp>
-        <p:nvSpPr>
-          <p:cNvPr id="5" name="장식"/>
-          <p:cNvSpPr/>
-          <p:nvPr/>
-        </p:nvSpPr>
-        <p:spPr>
-          <a:xfrm rot="4320000">
-            <a:off x="11105639" y="694629"/>
-            <a:ext cx="246888" cy="384048"/>
-          </a:xfrm>
-          <a:prstGeom prst="ellipse">
-            <a:avLst/>
-          </a:prstGeom>
-          <a:solidFill>
-            <a:srgbClr val="EED3E0"/>
-          </a:solidFill>
-          <a:ln>
-            <a:noFill/>
-          </a:ln>
-        </p:spPr>
-        <p:txBody>
-          <a:bodyPr rtlCol="0" anchor="ctr"/>
-          <a:lstStyle/>
-          <a:p>
-            <a:pPr algn="ctr"/>
-          </a:p>
-        </p:txBody>
-      </p:sp>
-      <p:sp>
-        <p:nvSpPr>
-          <p:cNvPr id="6" name="장식"/>
-          <p:cNvSpPr/>
-          <p:nvPr/>
-        </p:nvSpPr>
-        <p:spPr>
-          <a:xfrm rot="8640000">
-            <a:off x="11019273" y="960434"/>
-            <a:ext cx="246888" cy="384048"/>
-          </a:xfrm>
-          <a:prstGeom prst="ellipse">
-            <a:avLst/>
-          </a:prstGeom>
-          <a:solidFill>
-            <a:srgbClr val="B8618C"/>
-          </a:solidFill>
-          <a:ln>
-            <a:noFill/>
-          </a:ln>
-        </p:spPr>
-        <p:txBody>
-          <a:bodyPr rtlCol="0" anchor="ctr"/>
-          <a:lstStyle/>
-          <a:p>
-            <a:pPr algn="ctr"/>
-          </a:p>
-        </p:txBody>
-      </p:sp>
-      <p:sp>
-        <p:nvSpPr>
-          <p:cNvPr id="7" name="장식"/>
-          <p:cNvSpPr/>
-          <p:nvPr/>
-        </p:nvSpPr>
-        <p:spPr>
-          <a:xfrm rot="12960000">
-            <a:off x="10739788" y="960434"/>
-            <a:ext cx="246888" cy="384048"/>
-          </a:xfrm>
-          <a:prstGeom prst="ellipse">
-            <a:avLst/>
-          </a:prstGeom>
-          <a:solidFill>
-            <a:srgbClr val="EED3E0"/>
-          </a:solidFill>
-          <a:ln>
-            <a:noFill/>
-          </a:ln>
-        </p:spPr>
-        <p:txBody>
-          <a:bodyPr rtlCol="0" anchor="ctr"/>
-          <a:lstStyle/>
-          <a:p>
-            <a:pPr algn="ctr"/>
-          </a:p>
-        </p:txBody>
-      </p:sp>
-      <p:sp>
-        <p:nvSpPr>
-          <p:cNvPr id="8" name="장식"/>
-          <p:cNvSpPr/>
-          <p:nvPr/>
-        </p:nvSpPr>
-        <p:spPr>
-          <a:xfrm rot="17280000">
-            <a:off x="10653423" y="694629"/>
-            <a:ext cx="246888" cy="384048"/>
-          </a:xfrm>
-          <a:prstGeom prst="ellipse">
-            <a:avLst/>
-          </a:prstGeom>
-          <a:solidFill>
-            <a:srgbClr val="B8618C"/>
-          </a:solidFill>
-          <a:ln>
-            <a:noFill/>
-          </a:ln>
-        </p:spPr>
-        <p:txBody>
-          <a:bodyPr rtlCol="0" anchor="ctr"/>
-          <a:lstStyle/>
-          <a:p>
-            <a:pPr algn="ctr"/>
-          </a:p>
-        </p:txBody>
-      </p:sp>
-      <p:sp>
-        <p:nvSpPr>
-          <p:cNvPr id="9" name="장식"/>
-          <p:cNvSpPr/>
-          <p:nvPr/>
-        </p:nvSpPr>
-        <p:spPr>
-          <a:xfrm>
-            <a:off x="10920679" y="877824"/>
-            <a:ext cx="164592" cy="164592"/>
-          </a:xfrm>
-          <a:prstGeom prst="ellipse">
-            <a:avLst/>
-          </a:prstGeom>
-          <a:solidFill>
-            <a:srgbClr val="3F8D3F"/>
-          </a:solidFill>
-          <a:ln>
-            <a:noFill/>
-          </a:ln>
-        </p:spPr>
-        <p:txBody>
-          <a:bodyPr rtlCol="0" anchor="ctr"/>
-          <a:lstStyle/>
-          <a:p>
-            <a:pPr algn="ctr"/>
-          </a:p>
-        </p:txBody>
-      </p:sp>
-      <p:sp>
-        <p:nvSpPr>
-          <p:cNvPr id="10" name="장식"/>
-          <p:cNvSpPr/>
-          <p:nvPr/>
-        </p:nvSpPr>
-        <p:spPr>
-          <a:xfrm rot="1200000">
-            <a:off x="10478989" y="1163884"/>
-            <a:ext cx="123444" cy="192024"/>
-          </a:xfrm>
-          <a:prstGeom prst="ellipse">
-            <a:avLst/>
-          </a:prstGeom>
-          <a:solidFill>
-            <a:srgbClr val="B8618C"/>
-          </a:solidFill>
-          <a:ln>
-            <a:noFill/>
-          </a:ln>
-        </p:spPr>
-        <p:txBody>
-          <a:bodyPr rtlCol="0" anchor="ctr"/>
-          <a:lstStyle/>
-          <a:p>
-            <a:pPr algn="ctr"/>
-          </a:p>
-        </p:txBody>
-      </p:sp>
-      <p:sp>
-        <p:nvSpPr>
-          <p:cNvPr id="11" name="장식"/>
-          <p:cNvSpPr/>
-          <p:nvPr/>
-        </p:nvSpPr>
-        <p:spPr>
-          <a:xfrm rot="5520000">
-            <a:off x="10557132" y="1279736"/>
-            <a:ext cx="123444" cy="192024"/>
-          </a:xfrm>
-          <a:prstGeom prst="ellipse">
-            <a:avLst/>
-          </a:prstGeom>
-          <a:solidFill>
-            <a:srgbClr val="EED3E0"/>
-          </a:solidFill>
-          <a:ln>
-            <a:noFill/>
-          </a:ln>
-        </p:spPr>
-        <p:txBody>
-          <a:bodyPr rtlCol="0" anchor="ctr"/>
-          <a:lstStyle/>
-          <a:p>
-            <a:pPr algn="ctr"/>
-          </a:p>
-        </p:txBody>
-      </p:sp>
-      <p:sp>
-        <p:nvSpPr>
-          <p:cNvPr id="12" name="장식"/>
-          <p:cNvSpPr/>
-          <p:nvPr/>
-        </p:nvSpPr>
-        <p:spPr>
-          <a:xfrm rot="9840000">
-            <a:off x="10471098" y="1389855"/>
-            <a:ext cx="123444" cy="192024"/>
-          </a:xfrm>
-          <a:prstGeom prst="ellipse">
-            <a:avLst/>
-          </a:prstGeom>
-          <a:solidFill>
-            <a:srgbClr val="B8618C"/>
-          </a:solidFill>
-          <a:ln>
-            <a:noFill/>
-          </a:ln>
-        </p:spPr>
-        <p:txBody>
-          <a:bodyPr rtlCol="0" anchor="ctr"/>
-          <a:lstStyle/>
-          <a:p>
-            <a:pPr algn="ctr"/>
-          </a:p>
-        </p:txBody>
-      </p:sp>
-      <p:sp>
-        <p:nvSpPr>
-          <p:cNvPr id="13" name="장식"/>
-          <p:cNvSpPr/>
-          <p:nvPr/>
-        </p:nvSpPr>
-        <p:spPr>
-          <a:xfrm rot="14160000">
-            <a:off x="10339783" y="1342060"/>
-            <a:ext cx="123444" cy="192024"/>
-          </a:xfrm>
-          <a:prstGeom prst="ellipse">
-            <a:avLst/>
-          </a:prstGeom>
-          <a:solidFill>
-            <a:srgbClr val="EED3E0"/>
-          </a:solidFill>
-          <a:ln>
-            <a:noFill/>
-          </a:ln>
-        </p:spPr>
-        <p:txBody>
-          <a:bodyPr rtlCol="0" anchor="ctr"/>
-          <a:lstStyle/>
-          <a:p>
-            <a:pPr algn="ctr"/>
-          </a:p>
-        </p:txBody>
-      </p:sp>
-      <p:sp>
-        <p:nvSpPr>
-          <p:cNvPr id="14" name="장식"/>
-          <p:cNvSpPr/>
-          <p:nvPr/>
-        </p:nvSpPr>
-        <p:spPr>
-          <a:xfrm rot="18480000">
-            <a:off x="10344660" y="1202403"/>
-            <a:ext cx="123444" cy="192024"/>
-          </a:xfrm>
-          <a:prstGeom prst="ellipse">
-            <a:avLst/>
-          </a:prstGeom>
-          <a:solidFill>
-            <a:srgbClr val="B8618C"/>
-          </a:solidFill>
-          <a:ln>
-            <a:noFill/>
-          </a:ln>
-        </p:spPr>
-        <p:txBody>
-          <a:bodyPr rtlCol="0" anchor="ctr"/>
-          <a:lstStyle/>
-          <a:p>
-            <a:pPr algn="ctr"/>
-          </a:p>
-        </p:txBody>
-      </p:sp>
-      <p:sp>
-        <p:nvSpPr>
-          <p:cNvPr id="15" name="장식"/>
-          <p:cNvSpPr/>
-          <p:nvPr/>
-        </p:nvSpPr>
-        <p:spPr>
-          <a:xfrm>
-            <a:off x="10458907" y="1330452"/>
-            <a:ext cx="82296" cy="82296"/>
-          </a:xfrm>
-          <a:prstGeom prst="ellipse">
-            <a:avLst/>
-          </a:prstGeom>
-          <a:solidFill>
-            <a:srgbClr val="3F8D3F"/>
-          </a:solidFill>
-          <a:ln>
-            <a:noFill/>
-          </a:ln>
-        </p:spPr>
-        <p:txBody>
-          <a:bodyPr rtlCol="0" anchor="ctr"/>
-          <a:lstStyle/>
-          <a:p>
-            <a:pPr algn="ctr"/>
-          </a:p>
-        </p:txBody>
-      </p:sp>
-      <p:sp>
-        <p:nvSpPr>
-          <p:cNvPr id="16" name="장식"/>
-          <p:cNvSpPr/>
-          <p:nvPr/>
-        </p:nvSpPr>
-        <p:spPr>
-          <a:xfrm rot="2400000">
-            <a:off x="11518232" y="1260178"/>
-            <a:ext cx="103692" cy="161300"/>
-          </a:xfrm>
-          <a:prstGeom prst="ellipse">
-            <a:avLst/>
-          </a:prstGeom>
-          <a:solidFill>
-            <a:srgbClr val="B8618C"/>
-          </a:solidFill>
-          <a:ln>
-            <a:noFill/>
-          </a:ln>
-        </p:spPr>
-        <p:txBody>
-          <a:bodyPr rtlCol="0" anchor="ctr"/>
-          <a:lstStyle/>
-          <a:p>
-            <a:pPr algn="ctr"/>
-          </a:p>
-        </p:txBody>
-      </p:sp>
-      <p:sp>
-        <p:nvSpPr>
-          <p:cNvPr id="17" name="장식"/>
-          <p:cNvSpPr/>
-          <p:nvPr/>
-        </p:nvSpPr>
-        <p:spPr>
-          <a:xfrm rot="6720000">
-            <a:off x="11546630" y="1374075"/>
-            <a:ext cx="103692" cy="161300"/>
-          </a:xfrm>
-          <a:prstGeom prst="ellipse">
-            <a:avLst/>
-          </a:prstGeom>
-          <a:solidFill>
-            <a:srgbClr val="EED3E0"/>
-          </a:solidFill>
-          <a:ln>
-            <a:noFill/>
-          </a:ln>
-        </p:spPr>
-        <p:txBody>
-          <a:bodyPr rtlCol="0" anchor="ctr"/>
-          <a:lstStyle/>
-          <a:p>
-            <a:pPr algn="ctr"/>
-          </a:p>
-        </p:txBody>
-      </p:sp>
-      <p:sp>
-        <p:nvSpPr>
-          <p:cNvPr id="18" name="장식"/>
-          <p:cNvSpPr/>
-          <p:nvPr/>
-        </p:nvSpPr>
-        <p:spPr>
-          <a:xfrm rot="11040000">
-            <a:off x="11447083" y="1436279"/>
-            <a:ext cx="103692" cy="161300"/>
-          </a:xfrm>
-          <a:prstGeom prst="ellipse">
-            <a:avLst/>
-          </a:prstGeom>
-          <a:solidFill>
-            <a:srgbClr val="B8618C"/>
-          </a:solidFill>
-          <a:ln>
-            <a:noFill/>
-          </a:ln>
-        </p:spPr>
-        <p:txBody>
-          <a:bodyPr rtlCol="0" anchor="ctr"/>
-          <a:lstStyle/>
-          <a:p>
-            <a:pPr algn="ctr"/>
-          </a:p>
-        </p:txBody>
-      </p:sp>
-      <p:sp>
-        <p:nvSpPr>
-          <p:cNvPr id="19" name="장식"/>
-          <p:cNvSpPr/>
-          <p:nvPr/>
-        </p:nvSpPr>
-        <p:spPr>
-          <a:xfrm rot="15360000">
-            <a:off x="11357162" y="1360826"/>
-            <a:ext cx="103692" cy="161300"/>
-          </a:xfrm>
-          <a:prstGeom prst="ellipse">
-            <a:avLst/>
-          </a:prstGeom>
-          <a:solidFill>
-            <a:srgbClr val="EED3E0"/>
-          </a:solidFill>
-          <a:ln>
-            <a:noFill/>
-          </a:ln>
-        </p:spPr>
-        <p:txBody>
-          <a:bodyPr rtlCol="0" anchor="ctr"/>
-          <a:lstStyle/>
-          <a:p>
-            <a:pPr algn="ctr"/>
-          </a:p>
-        </p:txBody>
-      </p:sp>
-      <p:sp>
-        <p:nvSpPr>
-          <p:cNvPr id="20" name="장식"/>
-          <p:cNvSpPr/>
-          <p:nvPr/>
-        </p:nvSpPr>
-        <p:spPr>
-          <a:xfrm rot="19680000">
-            <a:off x="11401134" y="1251990"/>
-            <a:ext cx="103692" cy="161300"/>
-          </a:xfrm>
-          <a:prstGeom prst="ellipse">
-            <a:avLst/>
-          </a:prstGeom>
-          <a:solidFill>
-            <a:srgbClr val="B8618C"/>
-          </a:solidFill>
-          <a:ln>
-            <a:noFill/>
-          </a:ln>
-        </p:spPr>
-        <p:txBody>
-          <a:bodyPr rtlCol="0" anchor="ctr"/>
-          <a:lstStyle/>
-          <a:p>
-            <a:pPr algn="ctr"/>
-          </a:p>
-        </p:txBody>
-      </p:sp>
-      <p:sp>
-        <p:nvSpPr>
-          <p:cNvPr id="21" name="장식"/>
-          <p:cNvSpPr/>
-          <p:nvPr/>
-        </p:nvSpPr>
-        <p:spPr>
-          <a:xfrm>
-            <a:off x="11471330" y="1382755"/>
-            <a:ext cx="69128" cy="69128"/>
-          </a:xfrm>
-          <a:prstGeom prst="ellipse">
-            <a:avLst/>
-          </a:prstGeom>
-          <a:solidFill>
-            <a:srgbClr val="3F8D3F"/>
-          </a:solidFill>
-          <a:ln>
-            <a:noFill/>
-          </a:ln>
-        </p:spPr>
-        <p:txBody>
-          <a:bodyPr rtlCol="0" anchor="ctr"/>
-          <a:lstStyle/>
-          <a:p>
-            <a:pPr algn="ctr"/>
-          </a:p>
-        </p:txBody>
-      </p:sp>
-      <p:sp>
-        <p:nvSpPr>
           <p:cNvPr id="2" name="Title 1"/>
           <p:cNvSpPr>
             <a:spLocks noGrp="1"/>
@@ -6286,7 +4183,7 @@
       </p:sp>
       <p:sp>
         <p:nvSpPr>
-          <p:cNvPr id="22" name="카드 1"/>
+          <p:cNvPr id="4" name="카드 1"/>
           <p:cNvSpPr/>
           <p:nvPr/>
         </p:nvSpPr>
@@ -6319,7 +4216,7 @@
       </p:sp>
       <p:sp>
         <p:nvSpPr>
-          <p:cNvPr id="23" name="번호 1"/>
+          <p:cNvPr id="5" name="번호 1"/>
           <p:cNvSpPr/>
           <p:nvPr/>
         </p:nvSpPr>
@@ -6362,7 +4259,7 @@
       </p:sp>
       <p:sp>
         <p:nvSpPr>
-          <p:cNvPr id="24" name="TextBox 23"/>
+          <p:cNvPr id="6" name="TextBox 5"/>
           <p:cNvSpPr txBox="1"/>
           <p:nvPr/>
         </p:nvSpPr>
@@ -6400,7 +4297,7 @@
       </p:sp>
       <p:sp>
         <p:nvSpPr>
-          <p:cNvPr id="25" name="TextBox 24"/>
+          <p:cNvPr id="7" name="TextBox 6"/>
           <p:cNvSpPr txBox="1"/>
           <p:nvPr/>
         </p:nvSpPr>
@@ -6438,7 +4335,7 @@
       </p:sp>
       <p:sp>
         <p:nvSpPr>
-          <p:cNvPr id="26" name="카드 2"/>
+          <p:cNvPr id="8" name="카드 2"/>
           <p:cNvSpPr/>
           <p:nvPr/>
         </p:nvSpPr>
@@ -6471,7 +4368,7 @@
       </p:sp>
       <p:sp>
         <p:nvSpPr>
-          <p:cNvPr id="27" name="번호 2"/>
+          <p:cNvPr id="9" name="번호 2"/>
           <p:cNvSpPr/>
           <p:nvPr/>
         </p:nvSpPr>
@@ -6514,7 +4411,7 @@
       </p:sp>
       <p:sp>
         <p:nvSpPr>
-          <p:cNvPr id="28" name="TextBox 27"/>
+          <p:cNvPr id="10" name="TextBox 9"/>
           <p:cNvSpPr txBox="1"/>
           <p:nvPr/>
         </p:nvSpPr>
@@ -6552,7 +4449,7 @@
       </p:sp>
       <p:sp>
         <p:nvSpPr>
-          <p:cNvPr id="29" name="TextBox 28"/>
+          <p:cNvPr id="11" name="TextBox 10"/>
           <p:cNvSpPr txBox="1"/>
           <p:nvPr/>
         </p:nvSpPr>
@@ -6590,7 +4487,7 @@
       </p:sp>
       <p:sp>
         <p:nvSpPr>
-          <p:cNvPr id="30" name="카드 3"/>
+          <p:cNvPr id="12" name="카드 3"/>
           <p:cNvSpPr/>
           <p:nvPr/>
         </p:nvSpPr>
@@ -6623,7 +4520,7 @@
       </p:sp>
       <p:sp>
         <p:nvSpPr>
-          <p:cNvPr id="31" name="번호 3"/>
+          <p:cNvPr id="13" name="번호 3"/>
           <p:cNvSpPr/>
           <p:nvPr/>
         </p:nvSpPr>
@@ -6666,7 +4563,7 @@
       </p:sp>
       <p:sp>
         <p:nvSpPr>
-          <p:cNvPr id="32" name="TextBox 31"/>
+          <p:cNvPr id="14" name="TextBox 13"/>
           <p:cNvSpPr txBox="1"/>
           <p:nvPr/>
         </p:nvSpPr>
@@ -6704,7 +4601,7 @@
       </p:sp>
       <p:sp>
         <p:nvSpPr>
-          <p:cNvPr id="33" name="TextBox 32"/>
+          <p:cNvPr id="15" name="TextBox 14"/>
           <p:cNvSpPr txBox="1"/>
           <p:nvPr/>
         </p:nvSpPr>
@@ -6799,528 +4696,6 @@
       </p:sp>
       <p:sp>
         <p:nvSpPr>
-          <p:cNvPr id="4" name="장식"/>
-          <p:cNvSpPr/>
-          <p:nvPr/>
-        </p:nvSpPr>
-        <p:spPr>
-          <a:xfrm>
-            <a:off x="10879531" y="530352"/>
-            <a:ext cx="246888" cy="384048"/>
-          </a:xfrm>
-          <a:prstGeom prst="ellipse">
-            <a:avLst/>
-          </a:prstGeom>
-          <a:solidFill>
-            <a:srgbClr val="B8618C"/>
-          </a:solidFill>
-          <a:ln>
-            <a:noFill/>
-          </a:ln>
-        </p:spPr>
-        <p:txBody>
-          <a:bodyPr rtlCol="0" anchor="ctr"/>
-          <a:lstStyle/>
-          <a:p>
-            <a:pPr algn="ctr"/>
-          </a:p>
-        </p:txBody>
-      </p:sp>
-      <p:sp>
-        <p:nvSpPr>
-          <p:cNvPr id="5" name="장식"/>
-          <p:cNvSpPr/>
-          <p:nvPr/>
-        </p:nvSpPr>
-        <p:spPr>
-          <a:xfrm rot="4320000">
-            <a:off x="11105639" y="694629"/>
-            <a:ext cx="246888" cy="384048"/>
-          </a:xfrm>
-          <a:prstGeom prst="ellipse">
-            <a:avLst/>
-          </a:prstGeom>
-          <a:solidFill>
-            <a:srgbClr val="EED3E0"/>
-          </a:solidFill>
-          <a:ln>
-            <a:noFill/>
-          </a:ln>
-        </p:spPr>
-        <p:txBody>
-          <a:bodyPr rtlCol="0" anchor="ctr"/>
-          <a:lstStyle/>
-          <a:p>
-            <a:pPr algn="ctr"/>
-          </a:p>
-        </p:txBody>
-      </p:sp>
-      <p:sp>
-        <p:nvSpPr>
-          <p:cNvPr id="6" name="장식"/>
-          <p:cNvSpPr/>
-          <p:nvPr/>
-        </p:nvSpPr>
-        <p:spPr>
-          <a:xfrm rot="8640000">
-            <a:off x="11019273" y="960434"/>
-            <a:ext cx="246888" cy="384048"/>
-          </a:xfrm>
-          <a:prstGeom prst="ellipse">
-            <a:avLst/>
-          </a:prstGeom>
-          <a:solidFill>
-            <a:srgbClr val="B8618C"/>
-          </a:solidFill>
-          <a:ln>
-            <a:noFill/>
-          </a:ln>
-        </p:spPr>
-        <p:txBody>
-          <a:bodyPr rtlCol="0" anchor="ctr"/>
-          <a:lstStyle/>
-          <a:p>
-            <a:pPr algn="ctr"/>
-          </a:p>
-        </p:txBody>
-      </p:sp>
-      <p:sp>
-        <p:nvSpPr>
-          <p:cNvPr id="7" name="장식"/>
-          <p:cNvSpPr/>
-          <p:nvPr/>
-        </p:nvSpPr>
-        <p:spPr>
-          <a:xfrm rot="12960000">
-            <a:off x="10739788" y="960434"/>
-            <a:ext cx="246888" cy="384048"/>
-          </a:xfrm>
-          <a:prstGeom prst="ellipse">
-            <a:avLst/>
-          </a:prstGeom>
-          <a:solidFill>
-            <a:srgbClr val="EED3E0"/>
-          </a:solidFill>
-          <a:ln>
-            <a:noFill/>
-          </a:ln>
-        </p:spPr>
-        <p:txBody>
-          <a:bodyPr rtlCol="0" anchor="ctr"/>
-          <a:lstStyle/>
-          <a:p>
-            <a:pPr algn="ctr"/>
-          </a:p>
-        </p:txBody>
-      </p:sp>
-      <p:sp>
-        <p:nvSpPr>
-          <p:cNvPr id="8" name="장식"/>
-          <p:cNvSpPr/>
-          <p:nvPr/>
-        </p:nvSpPr>
-        <p:spPr>
-          <a:xfrm rot="17280000">
-            <a:off x="10653423" y="694629"/>
-            <a:ext cx="246888" cy="384048"/>
-          </a:xfrm>
-          <a:prstGeom prst="ellipse">
-            <a:avLst/>
-          </a:prstGeom>
-          <a:solidFill>
-            <a:srgbClr val="B8618C"/>
-          </a:solidFill>
-          <a:ln>
-            <a:noFill/>
-          </a:ln>
-        </p:spPr>
-        <p:txBody>
-          <a:bodyPr rtlCol="0" anchor="ctr"/>
-          <a:lstStyle/>
-          <a:p>
-            <a:pPr algn="ctr"/>
-          </a:p>
-        </p:txBody>
-      </p:sp>
-      <p:sp>
-        <p:nvSpPr>
-          <p:cNvPr id="9" name="장식"/>
-          <p:cNvSpPr/>
-          <p:nvPr/>
-        </p:nvSpPr>
-        <p:spPr>
-          <a:xfrm>
-            <a:off x="10920679" y="877824"/>
-            <a:ext cx="164592" cy="164592"/>
-          </a:xfrm>
-          <a:prstGeom prst="ellipse">
-            <a:avLst/>
-          </a:prstGeom>
-          <a:solidFill>
-            <a:srgbClr val="3F8D3F"/>
-          </a:solidFill>
-          <a:ln>
-            <a:noFill/>
-          </a:ln>
-        </p:spPr>
-        <p:txBody>
-          <a:bodyPr rtlCol="0" anchor="ctr"/>
-          <a:lstStyle/>
-          <a:p>
-            <a:pPr algn="ctr"/>
-          </a:p>
-        </p:txBody>
-      </p:sp>
-      <p:sp>
-        <p:nvSpPr>
-          <p:cNvPr id="10" name="장식"/>
-          <p:cNvSpPr/>
-          <p:nvPr/>
-        </p:nvSpPr>
-        <p:spPr>
-          <a:xfrm rot="1200000">
-            <a:off x="10478989" y="1163884"/>
-            <a:ext cx="123444" cy="192024"/>
-          </a:xfrm>
-          <a:prstGeom prst="ellipse">
-            <a:avLst/>
-          </a:prstGeom>
-          <a:solidFill>
-            <a:srgbClr val="B8618C"/>
-          </a:solidFill>
-          <a:ln>
-            <a:noFill/>
-          </a:ln>
-        </p:spPr>
-        <p:txBody>
-          <a:bodyPr rtlCol="0" anchor="ctr"/>
-          <a:lstStyle/>
-          <a:p>
-            <a:pPr algn="ctr"/>
-          </a:p>
-        </p:txBody>
-      </p:sp>
-      <p:sp>
-        <p:nvSpPr>
-          <p:cNvPr id="11" name="장식"/>
-          <p:cNvSpPr/>
-          <p:nvPr/>
-        </p:nvSpPr>
-        <p:spPr>
-          <a:xfrm rot="5520000">
-            <a:off x="10557132" y="1279736"/>
-            <a:ext cx="123444" cy="192024"/>
-          </a:xfrm>
-          <a:prstGeom prst="ellipse">
-            <a:avLst/>
-          </a:prstGeom>
-          <a:solidFill>
-            <a:srgbClr val="EED3E0"/>
-          </a:solidFill>
-          <a:ln>
-            <a:noFill/>
-          </a:ln>
-        </p:spPr>
-        <p:txBody>
-          <a:bodyPr rtlCol="0" anchor="ctr"/>
-          <a:lstStyle/>
-          <a:p>
-            <a:pPr algn="ctr"/>
-          </a:p>
-        </p:txBody>
-      </p:sp>
-      <p:sp>
-        <p:nvSpPr>
-          <p:cNvPr id="12" name="장식"/>
-          <p:cNvSpPr/>
-          <p:nvPr/>
-        </p:nvSpPr>
-        <p:spPr>
-          <a:xfrm rot="9840000">
-            <a:off x="10471098" y="1389855"/>
-            <a:ext cx="123444" cy="192024"/>
-          </a:xfrm>
-          <a:prstGeom prst="ellipse">
-            <a:avLst/>
-          </a:prstGeom>
-          <a:solidFill>
-            <a:srgbClr val="B8618C"/>
-          </a:solidFill>
-          <a:ln>
-            <a:noFill/>
-          </a:ln>
-        </p:spPr>
-        <p:txBody>
-          <a:bodyPr rtlCol="0" anchor="ctr"/>
-          <a:lstStyle/>
-          <a:p>
-            <a:pPr algn="ctr"/>
-          </a:p>
-        </p:txBody>
-      </p:sp>
-      <p:sp>
-        <p:nvSpPr>
-          <p:cNvPr id="13" name="장식"/>
-          <p:cNvSpPr/>
-          <p:nvPr/>
-        </p:nvSpPr>
-        <p:spPr>
-          <a:xfrm rot="14160000">
-            <a:off x="10339783" y="1342060"/>
-            <a:ext cx="123444" cy="192024"/>
-          </a:xfrm>
-          <a:prstGeom prst="ellipse">
-            <a:avLst/>
-          </a:prstGeom>
-          <a:solidFill>
-            <a:srgbClr val="EED3E0"/>
-          </a:solidFill>
-          <a:ln>
-            <a:noFill/>
-          </a:ln>
-        </p:spPr>
-        <p:txBody>
-          <a:bodyPr rtlCol="0" anchor="ctr"/>
-          <a:lstStyle/>
-          <a:p>
-            <a:pPr algn="ctr"/>
-          </a:p>
-        </p:txBody>
-      </p:sp>
-      <p:sp>
-        <p:nvSpPr>
-          <p:cNvPr id="14" name="장식"/>
-          <p:cNvSpPr/>
-          <p:nvPr/>
-        </p:nvSpPr>
-        <p:spPr>
-          <a:xfrm rot="18480000">
-            <a:off x="10344660" y="1202403"/>
-            <a:ext cx="123444" cy="192024"/>
-          </a:xfrm>
-          <a:prstGeom prst="ellipse">
-            <a:avLst/>
-          </a:prstGeom>
-          <a:solidFill>
-            <a:srgbClr val="B8618C"/>
-          </a:solidFill>
-          <a:ln>
-            <a:noFill/>
-          </a:ln>
-        </p:spPr>
-        <p:txBody>
-          <a:bodyPr rtlCol="0" anchor="ctr"/>
-          <a:lstStyle/>
-          <a:p>
-            <a:pPr algn="ctr"/>
-          </a:p>
-        </p:txBody>
-      </p:sp>
-      <p:sp>
-        <p:nvSpPr>
-          <p:cNvPr id="15" name="장식"/>
-          <p:cNvSpPr/>
-          <p:nvPr/>
-        </p:nvSpPr>
-        <p:spPr>
-          <a:xfrm>
-            <a:off x="10458907" y="1330452"/>
-            <a:ext cx="82296" cy="82296"/>
-          </a:xfrm>
-          <a:prstGeom prst="ellipse">
-            <a:avLst/>
-          </a:prstGeom>
-          <a:solidFill>
-            <a:srgbClr val="3F8D3F"/>
-          </a:solidFill>
-          <a:ln>
-            <a:noFill/>
-          </a:ln>
-        </p:spPr>
-        <p:txBody>
-          <a:bodyPr rtlCol="0" anchor="ctr"/>
-          <a:lstStyle/>
-          <a:p>
-            <a:pPr algn="ctr"/>
-          </a:p>
-        </p:txBody>
-      </p:sp>
-      <p:sp>
-        <p:nvSpPr>
-          <p:cNvPr id="16" name="장식"/>
-          <p:cNvSpPr/>
-          <p:nvPr/>
-        </p:nvSpPr>
-        <p:spPr>
-          <a:xfrm rot="2400000">
-            <a:off x="11518232" y="1260178"/>
-            <a:ext cx="103692" cy="161300"/>
-          </a:xfrm>
-          <a:prstGeom prst="ellipse">
-            <a:avLst/>
-          </a:prstGeom>
-          <a:solidFill>
-            <a:srgbClr val="B8618C"/>
-          </a:solidFill>
-          <a:ln>
-            <a:noFill/>
-          </a:ln>
-        </p:spPr>
-        <p:txBody>
-          <a:bodyPr rtlCol="0" anchor="ctr"/>
-          <a:lstStyle/>
-          <a:p>
-            <a:pPr algn="ctr"/>
-          </a:p>
-        </p:txBody>
-      </p:sp>
-      <p:sp>
-        <p:nvSpPr>
-          <p:cNvPr id="17" name="장식"/>
-          <p:cNvSpPr/>
-          <p:nvPr/>
-        </p:nvSpPr>
-        <p:spPr>
-          <a:xfrm rot="6720000">
-            <a:off x="11546630" y="1374075"/>
-            <a:ext cx="103692" cy="161300"/>
-          </a:xfrm>
-          <a:prstGeom prst="ellipse">
-            <a:avLst/>
-          </a:prstGeom>
-          <a:solidFill>
-            <a:srgbClr val="EED3E0"/>
-          </a:solidFill>
-          <a:ln>
-            <a:noFill/>
-          </a:ln>
-        </p:spPr>
-        <p:txBody>
-          <a:bodyPr rtlCol="0" anchor="ctr"/>
-          <a:lstStyle/>
-          <a:p>
-            <a:pPr algn="ctr"/>
-          </a:p>
-        </p:txBody>
-      </p:sp>
-      <p:sp>
-        <p:nvSpPr>
-          <p:cNvPr id="18" name="장식"/>
-          <p:cNvSpPr/>
-          <p:nvPr/>
-        </p:nvSpPr>
-        <p:spPr>
-          <a:xfrm rot="11040000">
-            <a:off x="11447083" y="1436279"/>
-            <a:ext cx="103692" cy="161300"/>
-          </a:xfrm>
-          <a:prstGeom prst="ellipse">
-            <a:avLst/>
-          </a:prstGeom>
-          <a:solidFill>
-            <a:srgbClr val="B8618C"/>
-          </a:solidFill>
-          <a:ln>
-            <a:noFill/>
-          </a:ln>
-        </p:spPr>
-        <p:txBody>
-          <a:bodyPr rtlCol="0" anchor="ctr"/>
-          <a:lstStyle/>
-          <a:p>
-            <a:pPr algn="ctr"/>
-          </a:p>
-        </p:txBody>
-      </p:sp>
-      <p:sp>
-        <p:nvSpPr>
-          <p:cNvPr id="19" name="장식"/>
-          <p:cNvSpPr/>
-          <p:nvPr/>
-        </p:nvSpPr>
-        <p:spPr>
-          <a:xfrm rot="15360000">
-            <a:off x="11357162" y="1360826"/>
-            <a:ext cx="103692" cy="161300"/>
-          </a:xfrm>
-          <a:prstGeom prst="ellipse">
-            <a:avLst/>
-          </a:prstGeom>
-          <a:solidFill>
-            <a:srgbClr val="EED3E0"/>
-          </a:solidFill>
-          <a:ln>
-            <a:noFill/>
-          </a:ln>
-        </p:spPr>
-        <p:txBody>
-          <a:bodyPr rtlCol="0" anchor="ctr"/>
-          <a:lstStyle/>
-          <a:p>
-            <a:pPr algn="ctr"/>
-          </a:p>
-        </p:txBody>
-      </p:sp>
-      <p:sp>
-        <p:nvSpPr>
-          <p:cNvPr id="20" name="장식"/>
-          <p:cNvSpPr/>
-          <p:nvPr/>
-        </p:nvSpPr>
-        <p:spPr>
-          <a:xfrm rot="19680000">
-            <a:off x="11401134" y="1251990"/>
-            <a:ext cx="103692" cy="161300"/>
-          </a:xfrm>
-          <a:prstGeom prst="ellipse">
-            <a:avLst/>
-          </a:prstGeom>
-          <a:solidFill>
-            <a:srgbClr val="B8618C"/>
-          </a:solidFill>
-          <a:ln>
-            <a:noFill/>
-          </a:ln>
-        </p:spPr>
-        <p:txBody>
-          <a:bodyPr rtlCol="0" anchor="ctr"/>
-          <a:lstStyle/>
-          <a:p>
-            <a:pPr algn="ctr"/>
-          </a:p>
-        </p:txBody>
-      </p:sp>
-      <p:sp>
-        <p:nvSpPr>
-          <p:cNvPr id="21" name="장식"/>
-          <p:cNvSpPr/>
-          <p:nvPr/>
-        </p:nvSpPr>
-        <p:spPr>
-          <a:xfrm>
-            <a:off x="11471330" y="1382755"/>
-            <a:ext cx="69128" cy="69128"/>
-          </a:xfrm>
-          <a:prstGeom prst="ellipse">
-            <a:avLst/>
-          </a:prstGeom>
-          <a:solidFill>
-            <a:srgbClr val="3F8D3F"/>
-          </a:solidFill>
-          <a:ln>
-            <a:noFill/>
-          </a:ln>
-        </p:spPr>
-        <p:txBody>
-          <a:bodyPr rtlCol="0" anchor="ctr"/>
-          <a:lstStyle/>
-          <a:p>
-            <a:pPr algn="ctr"/>
-          </a:p>
-        </p:txBody>
-      </p:sp>
-      <p:sp>
-        <p:nvSpPr>
           <p:cNvPr id="2" name="Title 1"/>
           <p:cNvSpPr>
             <a:spLocks noGrp="1"/>
@@ -7359,7 +4734,7 @@
       </p:sp>
       <p:sp>
         <p:nvSpPr>
-          <p:cNvPr id="22" name="사진 자리"/>
+          <p:cNvPr id="4" name="사진 자리"/>
           <p:cNvSpPr/>
           <p:nvPr/>
         </p:nvSpPr>
@@ -7407,7 +4782,7 @@
       </p:sp>
       <p:sp>
         <p:nvSpPr>
-          <p:cNvPr id="23" name="사진 자리"/>
+          <p:cNvPr id="5" name="사진 자리"/>
           <p:cNvSpPr/>
           <p:nvPr/>
         </p:nvSpPr>
@@ -7455,7 +4830,7 @@
       </p:sp>
       <p:sp>
         <p:nvSpPr>
-          <p:cNvPr id="24" name="사진 자리"/>
+          <p:cNvPr id="6" name="사진 자리"/>
           <p:cNvSpPr/>
           <p:nvPr/>
         </p:nvSpPr>
@@ -7503,7 +4878,7 @@
       </p:sp>
       <p:sp>
         <p:nvSpPr>
-          <p:cNvPr id="25" name="사진 자리"/>
+          <p:cNvPr id="7" name="사진 자리"/>
           <p:cNvSpPr/>
           <p:nvPr/>
         </p:nvSpPr>
@@ -7551,7 +4926,7 @@
       </p:sp>
       <p:sp>
         <p:nvSpPr>
-          <p:cNvPr id="26" name="사진 자리"/>
+          <p:cNvPr id="8" name="사진 자리"/>
           <p:cNvSpPr/>
           <p:nvPr/>
         </p:nvSpPr>
@@ -7599,7 +4974,7 @@
       </p:sp>
       <p:sp>
         <p:nvSpPr>
-          <p:cNvPr id="27" name="사진 자리"/>
+          <p:cNvPr id="9" name="사진 자리"/>
           <p:cNvSpPr/>
           <p:nvPr/>
         </p:nvSpPr>
@@ -7656,14 +5031,6 @@
 <file path=ppt/slides/slide6.xml><?xml version="1.0" encoding="utf-8"?>
 <p:sld xmlns:a="http://schemas.openxmlformats.org/drawingml/2006/main" xmlns:p="http://schemas.openxmlformats.org/presentationml/2006/main" xmlns:r="http://schemas.openxmlformats.org/officeDocument/2006/relationships">
   <p:cSld>
-    <p:bg>
-      <p:bgPr>
-        <a:solidFill>
-          <a:srgbClr val="7B3759"/>
-        </a:solidFill>
-        <a:effectLst/>
-      </p:bgPr>
-    </p:bg>
     <p:spTree>
       <p:nvGrpSpPr>
         <p:cNvPr id="1" name=""/>
@@ -7671,559 +5038,30 @@
         <p:nvPr/>
       </p:nvGrpSpPr>
       <p:grpSpPr/>
-      <p:sp>
-        <p:nvSpPr>
-          <p:cNvPr id="3" name="장식"/>
-          <p:cNvSpPr/>
+      <p:pic>
+        <p:nvPicPr>
+          <p:cNvPr id="3" name="표지 그림" descr="wedding-25.jpg"/>
+          <p:cNvPicPr>
+            <a:picLocks noChangeAspect="1"/>
+          </p:cNvPicPr>
           <p:nvPr/>
-        </p:nvSpPr>
-        <p:spPr>
-          <a:xfrm>
-            <a:off x="457200" y="457200"/>
-            <a:ext cx="11277295" cy="5943600"/>
-          </a:xfrm>
-          <a:prstGeom prst="roundRect">
-            <a:avLst>
-              <a:gd name="adj" fmla="val 5000"/>
-            </a:avLst>
-          </a:prstGeom>
-          <a:solidFill>
-            <a:srgbClr val="FFFFFF"/>
-          </a:solidFill>
-          <a:ln>
-            <a:noFill/>
-          </a:ln>
-        </p:spPr>
-        <p:txBody>
-          <a:bodyPr rtlCol="0" anchor="ctr"/>
-          <a:lstStyle/>
-          <a:p>
-            <a:pPr algn="ctr"/>
-          </a:p>
-        </p:txBody>
-      </p:sp>
-      <p:sp>
-        <p:nvSpPr>
-          <p:cNvPr id="4" name="장식"/>
-          <p:cNvSpPr/>
-          <p:nvPr/>
-        </p:nvSpPr>
-        <p:spPr>
-          <a:xfrm>
-            <a:off x="5892165" y="662482"/>
-            <a:ext cx="407365" cy="633679"/>
-          </a:xfrm>
-          <a:prstGeom prst="ellipse">
+        </p:nvPicPr>
+        <p:blipFill>
+          <a:blip r:embed="rId2"/>
+          <a:stretch>
+            <a:fillRect/>
+          </a:stretch>
+        </p:blipFill>
+        <p:spPr>
+          <a:xfrm>
+            <a:off x="0" y="0"/>
+            <a:ext cx="12191695" cy="6858000"/>
+          </a:xfrm>
+          <a:prstGeom prst="rect">
             <a:avLst/>
           </a:prstGeom>
-          <a:solidFill>
-            <a:srgbClr val="B8618C"/>
-          </a:solidFill>
-          <a:ln>
-            <a:noFill/>
-          </a:ln>
-        </p:spPr>
-        <p:txBody>
-          <a:bodyPr rtlCol="0" anchor="ctr"/>
-          <a:lstStyle/>
-          <a:p>
-            <a:pPr algn="ctr"/>
-          </a:p>
-        </p:txBody>
-      </p:sp>
-      <p:sp>
-        <p:nvSpPr>
-          <p:cNvPr id="5" name="장식"/>
-          <p:cNvSpPr/>
-          <p:nvPr/>
-        </p:nvSpPr>
-        <p:spPr>
-          <a:xfrm rot="4320000">
-            <a:off x="6265243" y="933539"/>
-            <a:ext cx="407365" cy="633679"/>
-          </a:xfrm>
-          <a:prstGeom prst="ellipse">
-            <a:avLst/>
-          </a:prstGeom>
-          <a:solidFill>
-            <a:srgbClr val="EED3E0"/>
-          </a:solidFill>
-          <a:ln>
-            <a:noFill/>
-          </a:ln>
-        </p:spPr>
-        <p:txBody>
-          <a:bodyPr rtlCol="0" anchor="ctr"/>
-          <a:lstStyle/>
-          <a:p>
-            <a:pPr algn="ctr"/>
-          </a:p>
-        </p:txBody>
-      </p:sp>
-      <p:sp>
-        <p:nvSpPr>
-          <p:cNvPr id="6" name="장식"/>
-          <p:cNvSpPr/>
-          <p:nvPr/>
-        </p:nvSpPr>
-        <p:spPr>
-          <a:xfrm rot="8640000">
-            <a:off x="6122739" y="1372119"/>
-            <a:ext cx="407365" cy="633679"/>
-          </a:xfrm>
-          <a:prstGeom prst="ellipse">
-            <a:avLst/>
-          </a:prstGeom>
-          <a:solidFill>
-            <a:srgbClr val="B8618C"/>
-          </a:solidFill>
-          <a:ln>
-            <a:noFill/>
-          </a:ln>
-        </p:spPr>
-        <p:txBody>
-          <a:bodyPr rtlCol="0" anchor="ctr"/>
-          <a:lstStyle/>
-          <a:p>
-            <a:pPr algn="ctr"/>
-          </a:p>
-        </p:txBody>
-      </p:sp>
-      <p:sp>
-        <p:nvSpPr>
-          <p:cNvPr id="7" name="장식"/>
-          <p:cNvSpPr/>
-          <p:nvPr/>
-        </p:nvSpPr>
-        <p:spPr>
-          <a:xfrm rot="12960000">
-            <a:off x="5661590" y="1372119"/>
-            <a:ext cx="407365" cy="633679"/>
-          </a:xfrm>
-          <a:prstGeom prst="ellipse">
-            <a:avLst/>
-          </a:prstGeom>
-          <a:solidFill>
-            <a:srgbClr val="EED3E0"/>
-          </a:solidFill>
-          <a:ln>
-            <a:noFill/>
-          </a:ln>
-        </p:spPr>
-        <p:txBody>
-          <a:bodyPr rtlCol="0" anchor="ctr"/>
-          <a:lstStyle/>
-          <a:p>
-            <a:pPr algn="ctr"/>
-          </a:p>
-        </p:txBody>
-      </p:sp>
-      <p:sp>
-        <p:nvSpPr>
-          <p:cNvPr id="8" name="장식"/>
-          <p:cNvSpPr/>
-          <p:nvPr/>
-        </p:nvSpPr>
-        <p:spPr>
-          <a:xfrm rot="17280000">
-            <a:off x="5519086" y="933539"/>
-            <a:ext cx="407365" cy="633679"/>
-          </a:xfrm>
-          <a:prstGeom prst="ellipse">
-            <a:avLst/>
-          </a:prstGeom>
-          <a:solidFill>
-            <a:srgbClr val="B8618C"/>
-          </a:solidFill>
-          <a:ln>
-            <a:noFill/>
-          </a:ln>
-        </p:spPr>
-        <p:txBody>
-          <a:bodyPr rtlCol="0" anchor="ctr"/>
-          <a:lstStyle/>
-          <a:p>
-            <a:pPr algn="ctr"/>
-          </a:p>
-        </p:txBody>
-      </p:sp>
-      <p:sp>
-        <p:nvSpPr>
-          <p:cNvPr id="9" name="장식"/>
-          <p:cNvSpPr/>
-          <p:nvPr/>
-        </p:nvSpPr>
-        <p:spPr>
-          <a:xfrm>
-            <a:off x="5960059" y="1235811"/>
-            <a:ext cx="271576" cy="271576"/>
-          </a:xfrm>
-          <a:prstGeom prst="ellipse">
-            <a:avLst/>
-          </a:prstGeom>
-          <a:solidFill>
-            <a:srgbClr val="3F8D3F"/>
-          </a:solidFill>
-          <a:ln>
-            <a:noFill/>
-          </a:ln>
-        </p:spPr>
-        <p:txBody>
-          <a:bodyPr rtlCol="0" anchor="ctr"/>
-          <a:lstStyle/>
-          <a:p>
-            <a:pPr algn="ctr"/>
-          </a:p>
-        </p:txBody>
-      </p:sp>
-      <p:sp>
-        <p:nvSpPr>
-          <p:cNvPr id="10" name="장식"/>
-          <p:cNvSpPr/>
-          <p:nvPr/>
-        </p:nvSpPr>
-        <p:spPr>
-          <a:xfrm rot="1200000">
-            <a:off x="5231271" y="1707812"/>
-            <a:ext cx="203682" cy="316839"/>
-          </a:xfrm>
-          <a:prstGeom prst="ellipse">
-            <a:avLst/>
-          </a:prstGeom>
-          <a:solidFill>
-            <a:srgbClr val="B8618C"/>
-          </a:solidFill>
-          <a:ln>
-            <a:noFill/>
-          </a:ln>
-        </p:spPr>
-        <p:txBody>
-          <a:bodyPr rtlCol="0" anchor="ctr"/>
-          <a:lstStyle/>
-          <a:p>
-            <a:pPr algn="ctr"/>
-          </a:p>
-        </p:txBody>
-      </p:sp>
-      <p:sp>
-        <p:nvSpPr>
-          <p:cNvPr id="11" name="장식"/>
-          <p:cNvSpPr/>
-          <p:nvPr/>
-        </p:nvSpPr>
-        <p:spPr>
-          <a:xfrm rot="5520000">
-            <a:off x="5360207" y="1898967"/>
-            <a:ext cx="203682" cy="316839"/>
-          </a:xfrm>
-          <a:prstGeom prst="ellipse">
-            <a:avLst/>
-          </a:prstGeom>
-          <a:solidFill>
-            <a:srgbClr val="EED3E0"/>
-          </a:solidFill>
-          <a:ln>
-            <a:noFill/>
-          </a:ln>
-        </p:spPr>
-        <p:txBody>
-          <a:bodyPr rtlCol="0" anchor="ctr"/>
-          <a:lstStyle/>
-          <a:p>
-            <a:pPr algn="ctr"/>
-          </a:p>
-        </p:txBody>
-      </p:sp>
-      <p:sp>
-        <p:nvSpPr>
-          <p:cNvPr id="12" name="장식"/>
-          <p:cNvSpPr/>
-          <p:nvPr/>
-        </p:nvSpPr>
-        <p:spPr>
-          <a:xfrm rot="9840000">
-            <a:off x="5218251" y="2080662"/>
-            <a:ext cx="203682" cy="316839"/>
-          </a:xfrm>
-          <a:prstGeom prst="ellipse">
-            <a:avLst/>
-          </a:prstGeom>
-          <a:solidFill>
-            <a:srgbClr val="B8618C"/>
-          </a:solidFill>
-          <a:ln>
-            <a:noFill/>
-          </a:ln>
-        </p:spPr>
-        <p:txBody>
-          <a:bodyPr rtlCol="0" anchor="ctr"/>
-          <a:lstStyle/>
-          <a:p>
-            <a:pPr algn="ctr"/>
-          </a:p>
-        </p:txBody>
-      </p:sp>
-      <p:sp>
-        <p:nvSpPr>
-          <p:cNvPr id="13" name="장식"/>
-          <p:cNvSpPr/>
-          <p:nvPr/>
-        </p:nvSpPr>
-        <p:spPr>
-          <a:xfrm rot="14160000">
-            <a:off x="5001581" y="2001801"/>
-            <a:ext cx="203682" cy="316839"/>
-          </a:xfrm>
-          <a:prstGeom prst="ellipse">
-            <a:avLst/>
-          </a:prstGeom>
-          <a:solidFill>
-            <a:srgbClr val="EED3E0"/>
-          </a:solidFill>
-          <a:ln>
-            <a:noFill/>
-          </a:ln>
-        </p:spPr>
-        <p:txBody>
-          <a:bodyPr rtlCol="0" anchor="ctr"/>
-          <a:lstStyle/>
-          <a:p>
-            <a:pPr algn="ctr"/>
-          </a:p>
-        </p:txBody>
-      </p:sp>
-      <p:sp>
-        <p:nvSpPr>
-          <p:cNvPr id="14" name="장식"/>
-          <p:cNvSpPr/>
-          <p:nvPr/>
-        </p:nvSpPr>
-        <p:spPr>
-          <a:xfrm rot="18480000">
-            <a:off x="5009628" y="1771367"/>
-            <a:ext cx="203682" cy="316839"/>
-          </a:xfrm>
-          <a:prstGeom prst="ellipse">
-            <a:avLst/>
-          </a:prstGeom>
-          <a:solidFill>
-            <a:srgbClr val="B8618C"/>
-          </a:solidFill>
-          <a:ln>
-            <a:noFill/>
-          </a:ln>
-        </p:spPr>
-        <p:txBody>
-          <a:bodyPr rtlCol="0" anchor="ctr"/>
-          <a:lstStyle/>
-          <a:p>
-            <a:pPr algn="ctr"/>
-          </a:p>
-        </p:txBody>
-      </p:sp>
-      <p:sp>
-        <p:nvSpPr>
-          <p:cNvPr id="15" name="장식"/>
-          <p:cNvSpPr/>
-          <p:nvPr/>
-        </p:nvSpPr>
-        <p:spPr>
-          <a:xfrm>
-            <a:off x="5198135" y="1982647"/>
-            <a:ext cx="135788" cy="135788"/>
-          </a:xfrm>
-          <a:prstGeom prst="ellipse">
-            <a:avLst/>
-          </a:prstGeom>
-          <a:solidFill>
-            <a:srgbClr val="3F8D3F"/>
-          </a:solidFill>
-          <a:ln>
-            <a:noFill/>
-          </a:ln>
-        </p:spPr>
-        <p:txBody>
-          <a:bodyPr rtlCol="0" anchor="ctr"/>
-          <a:lstStyle/>
-          <a:p>
-            <a:pPr algn="ctr"/>
-          </a:p>
-        </p:txBody>
-      </p:sp>
-      <p:sp>
-        <p:nvSpPr>
-          <p:cNvPr id="16" name="장식"/>
-          <p:cNvSpPr/>
-          <p:nvPr/>
-        </p:nvSpPr>
-        <p:spPr>
-          <a:xfrm rot="2400000">
-            <a:off x="6946022" y="1866696"/>
-            <a:ext cx="171093" cy="266145"/>
-          </a:xfrm>
-          <a:prstGeom prst="ellipse">
-            <a:avLst/>
-          </a:prstGeom>
-          <a:solidFill>
-            <a:srgbClr val="B8618C"/>
-          </a:solidFill>
-          <a:ln>
-            <a:noFill/>
-          </a:ln>
-        </p:spPr>
-        <p:txBody>
-          <a:bodyPr rtlCol="0" anchor="ctr"/>
-          <a:lstStyle/>
-          <a:p>
-            <a:pPr algn="ctr"/>
-          </a:p>
-        </p:txBody>
-      </p:sp>
-      <p:sp>
-        <p:nvSpPr>
-          <p:cNvPr id="17" name="장식"/>
-          <p:cNvSpPr/>
-          <p:nvPr/>
-        </p:nvSpPr>
-        <p:spPr>
-          <a:xfrm rot="6720000">
-            <a:off x="6992878" y="2054626"/>
-            <a:ext cx="171093" cy="266145"/>
-          </a:xfrm>
-          <a:prstGeom prst="ellipse">
-            <a:avLst/>
-          </a:prstGeom>
-          <a:solidFill>
-            <a:srgbClr val="EED3E0"/>
-          </a:solidFill>
-          <a:ln>
-            <a:noFill/>
-          </a:ln>
-        </p:spPr>
-        <p:txBody>
-          <a:bodyPr rtlCol="0" anchor="ctr"/>
-          <a:lstStyle/>
-          <a:p>
-            <a:pPr algn="ctr"/>
-          </a:p>
-        </p:txBody>
-      </p:sp>
-      <p:sp>
-        <p:nvSpPr>
-          <p:cNvPr id="18" name="장식"/>
-          <p:cNvSpPr/>
-          <p:nvPr/>
-        </p:nvSpPr>
-        <p:spPr>
-          <a:xfrm rot="11040000">
-            <a:off x="6828626" y="2157262"/>
-            <a:ext cx="171093" cy="266145"/>
-          </a:xfrm>
-          <a:prstGeom prst="ellipse">
-            <a:avLst/>
-          </a:prstGeom>
-          <a:solidFill>
-            <a:srgbClr val="B8618C"/>
-          </a:solidFill>
-          <a:ln>
-            <a:noFill/>
-          </a:ln>
-        </p:spPr>
-        <p:txBody>
-          <a:bodyPr rtlCol="0" anchor="ctr"/>
-          <a:lstStyle/>
-          <a:p>
-            <a:pPr algn="ctr"/>
-          </a:p>
-        </p:txBody>
-      </p:sp>
-      <p:sp>
-        <p:nvSpPr>
-          <p:cNvPr id="19" name="장식"/>
-          <p:cNvSpPr/>
-          <p:nvPr/>
-        </p:nvSpPr>
-        <p:spPr>
-          <a:xfrm rot="15360000">
-            <a:off x="6680256" y="2032765"/>
-            <a:ext cx="171093" cy="266145"/>
-          </a:xfrm>
-          <a:prstGeom prst="ellipse">
-            <a:avLst/>
-          </a:prstGeom>
-          <a:solidFill>
-            <a:srgbClr val="EED3E0"/>
-          </a:solidFill>
-          <a:ln>
-            <a:noFill/>
-          </a:ln>
-        </p:spPr>
-        <p:txBody>
-          <a:bodyPr rtlCol="0" anchor="ctr"/>
-          <a:lstStyle/>
-          <a:p>
-            <a:pPr algn="ctr"/>
-          </a:p>
-        </p:txBody>
-      </p:sp>
-      <p:sp>
-        <p:nvSpPr>
-          <p:cNvPr id="20" name="장식"/>
-          <p:cNvSpPr/>
-          <p:nvPr/>
-        </p:nvSpPr>
-        <p:spPr>
-          <a:xfrm rot="19680000">
-            <a:off x="6752811" y="1853185"/>
-            <a:ext cx="171093" cy="266145"/>
-          </a:xfrm>
-          <a:prstGeom prst="ellipse">
-            <a:avLst/>
-          </a:prstGeom>
-          <a:solidFill>
-            <a:srgbClr val="B8618C"/>
-          </a:solidFill>
-          <a:ln>
-            <a:noFill/>
-          </a:ln>
-        </p:spPr>
-        <p:txBody>
-          <a:bodyPr rtlCol="0" anchor="ctr"/>
-          <a:lstStyle/>
-          <a:p>
-            <a:pPr algn="ctr"/>
-          </a:p>
-        </p:txBody>
-      </p:sp>
-      <p:sp>
-        <p:nvSpPr>
-          <p:cNvPr id="21" name="장식"/>
-          <p:cNvSpPr/>
-          <p:nvPr/>
-        </p:nvSpPr>
-        <p:spPr>
-          <a:xfrm>
-            <a:off x="6868634" y="2068948"/>
-            <a:ext cx="114062" cy="114062"/>
-          </a:xfrm>
-          <a:prstGeom prst="ellipse">
-            <a:avLst/>
-          </a:prstGeom>
-          <a:solidFill>
-            <a:srgbClr val="3F8D3F"/>
-          </a:solidFill>
-          <a:ln>
-            <a:noFill/>
-          </a:ln>
-        </p:spPr>
-        <p:txBody>
-          <a:bodyPr rtlCol="0" anchor="ctr"/>
-          <a:lstStyle/>
-          <a:p>
-            <a:pPr algn="ctr"/>
-          </a:p>
-        </p:txBody>
-      </p:sp>
+        </p:spPr>
+      </p:pic>
       <p:sp>
         <p:nvSpPr>
           <p:cNvPr id="2" name="Title 1"/>
@@ -8236,8 +5074,8 @@
         </p:nvSpPr>
         <p:spPr>
           <a:xfrm>
-            <a:off x="1463003" y="2263140"/>
-            <a:ext cx="9265688" cy="1371600"/>
+            <a:off x="853418" y="2057400"/>
+            <a:ext cx="6095847" cy="1554480"/>
           </a:xfrm>
         </p:spPr>
         <p:txBody>
@@ -8246,7 +5084,7 @@
           </a:bodyPr>
           <a:lstStyle/>
           <a:p>
-            <a:pPr algn="ctr">
+            <a:pPr algn="l">
               <a:lnSpc>
                 <a:spcPct val="105000"/>
               </a:lnSpc>
@@ -8257,21 +5095,21 @@
                   <a:srgbClr val="7B3759"/>
                 </a:solidFill>
               </a:rPr>
-              <a:t>함께해 주셔서 감사합니다</a:t>
-            </a:r>
-          </a:p>
-        </p:txBody>
-      </p:sp>
-      <p:sp>
-        <p:nvSpPr>
-          <p:cNvPr id="22" name="한 줄 문구"/>
+              <a:t>와 주셔서 고맙습니다</a:t>
+            </a:r>
+          </a:p>
+        </p:txBody>
+      </p:sp>
+      <p:sp>
+        <p:nvSpPr>
+          <p:cNvPr id="4" name="한 줄 문구"/>
           <p:cNvSpPr txBox="1"/>
           <p:nvPr/>
         </p:nvSpPr>
         <p:spPr>
           <a:xfrm>
-            <a:off x="1463003" y="3726180"/>
-            <a:ext cx="9265688" cy="822960"/>
+            <a:off x="853418" y="3749039"/>
+            <a:ext cx="6095847" cy="822960"/>
           </a:xfrm>
           <a:prstGeom prst="rect">
             <a:avLst/>
@@ -8284,7 +5122,7 @@
           </a:bodyPr>
           <a:lstStyle/>
           <a:p>
-            <a:pPr algn="ctr">
+            <a:pPr algn="l">
               <a:lnSpc>
                 <a:spcPct val="115000"/>
               </a:lnSpc>
@@ -8295,21 +5133,21 @@
                   <a:srgbClr val="7B3759"/>
                 </a:solidFill>
               </a:rPr>
-              <a:t>오늘의 축복을 오래도록 간직하겠습니다</a:t>
-            </a:r>
-          </a:p>
-        </p:txBody>
-      </p:sp>
-      <p:sp>
-        <p:nvSpPr>
-          <p:cNvPr id="23" name="안내 문구"/>
+              <a:t>잘 살겠습니다</a:t>
+            </a:r>
+          </a:p>
+        </p:txBody>
+      </p:sp>
+      <p:sp>
+        <p:nvSpPr>
+          <p:cNvPr id="5" name="안내 문구"/>
           <p:cNvSpPr txBox="1"/>
           <p:nvPr/>
         </p:nvSpPr>
         <p:spPr>
           <a:xfrm>
-            <a:off x="1463003" y="4594860"/>
-            <a:ext cx="9265688" cy="914400"/>
+            <a:off x="853418" y="4617720"/>
+            <a:ext cx="6095847" cy="914400"/>
           </a:xfrm>
           <a:prstGeom prst="rect">
             <a:avLst/>
@@ -8322,7 +5160,7 @@
           </a:bodyPr>
           <a:lstStyle/>
           <a:p>
-            <a:pPr algn="ctr">
+            <a:pPr algn="l">
               <a:lnSpc>
                 <a:spcPct val="115000"/>
               </a:lnSpc>

--- a/public/fun/pack/pptx/wedding/결혼식_25_감사·답례중심_연꽃연못.pptx
+++ b/public/fun/pack/pptx/wedding/결혼식_25_감사·답례중심_연꽃연못.pptx
@@ -3347,7 +3347,7 @@
             <a:r>
               <a:rPr sz="3600" b="1" i="0">
                 <a:solidFill>
-                  <a:srgbClr val="7B3759"/>
+                  <a:srgbClr val="1D115F"/>
                 </a:solidFill>
               </a:rPr>
               <a:t>저희 결혼합니다</a:t>
@@ -3385,7 +3385,7 @@
             <a:r>
               <a:rPr sz="1700" b="0" i="1">
                 <a:solidFill>
-                  <a:srgbClr val="7B3759"/>
+                  <a:srgbClr val="1D115F"/>
                 </a:solidFill>
               </a:rPr>
               <a:t>더운 날 와 주셔서 고맙습니다</a:t>
@@ -3460,7 +3460,7 @@
     <p:bg>
       <p:bgPr>
         <a:solidFill>
-          <a:srgbClr val="B8618C"/>
+          <a:srgbClr val="3D26C5"/>
         </a:solidFill>
         <a:effectLst/>
       </p:bgPr>
@@ -3533,7 +3533,7 @@
             <a:r>
               <a:rPr sz="3000" b="1" i="0">
                 <a:solidFill>
-                  <a:srgbClr val="7B3759"/>
+                  <a:srgbClr val="1D115F"/>
                 </a:solidFill>
               </a:rPr>
               <a:t>신랑 · 신부 소개</a:t>
@@ -3556,11 +3556,11 @@
             <a:avLst/>
           </a:prstGeom>
           <a:solidFill>
-            <a:srgbClr val="EED3E0"/>
+            <a:srgbClr val="D7D1FA"/>
           </a:solidFill>
           <a:ln w="19050">
             <a:solidFill>
-              <a:srgbClr val="B8618C"/>
+              <a:srgbClr val="3D26C5"/>
             </a:solidFill>
             <a:prstDash val="dash"/>
           </a:ln>
@@ -3579,7 +3579,7 @@
             <a:r>
               <a:rPr sz="1200" b="0" i="0">
                 <a:solidFill>
-                  <a:srgbClr val="7B3759"/>
+                  <a:srgbClr val="1D115F"/>
                 </a:solidFill>
               </a:rPr>
               <a:t>사진</a:t>
@@ -3617,7 +3617,7 @@
             <a:r>
               <a:rPr sz="1600" b="1" i="0">
                 <a:solidFill>
-                  <a:srgbClr val="7B3759"/>
+                  <a:srgbClr val="1D115F"/>
                 </a:solidFill>
               </a:rPr>
               <a:t>신랑</a:t>
@@ -3708,11 +3708,11 @@
             <a:avLst/>
           </a:prstGeom>
           <a:solidFill>
-            <a:srgbClr val="EED3E0"/>
+            <a:srgbClr val="D7D1FA"/>
           </a:solidFill>
           <a:ln w="19050">
             <a:solidFill>
-              <a:srgbClr val="B8618C"/>
+              <a:srgbClr val="3D26C5"/>
             </a:solidFill>
             <a:prstDash val="dash"/>
           </a:ln>
@@ -3731,7 +3731,7 @@
             <a:r>
               <a:rPr sz="1200" b="0" i="0">
                 <a:solidFill>
-                  <a:srgbClr val="7B3759"/>
+                  <a:srgbClr val="1D115F"/>
                 </a:solidFill>
               </a:rPr>
               <a:t>사진</a:t>
@@ -3769,7 +3769,7 @@
             <a:r>
               <a:rPr sz="1600" b="1" i="0">
                 <a:solidFill>
-                  <a:srgbClr val="7B3759"/>
+                  <a:srgbClr val="1D115F"/>
                 </a:solidFill>
               </a:rPr>
               <a:t>신부</a:t>
@@ -3859,7 +3859,7 @@
     <p:bg>
       <p:bgPr>
         <a:solidFill>
-          <a:srgbClr val="B8618C"/>
+          <a:srgbClr val="3D26C5"/>
         </a:solidFill>
         <a:effectLst/>
       </p:bgPr>
@@ -3932,7 +3932,7 @@
             <a:r>
               <a:rPr sz="3000" b="1" i="0">
                 <a:solidFill>
-                  <a:srgbClr val="7B3759"/>
+                  <a:srgbClr val="1D115F"/>
                 </a:solidFill>
               </a:rPr>
               <a:t>감사의 말씀</a:t>
@@ -3957,11 +3957,11 @@
             </a:avLst>
           </a:prstGeom>
           <a:solidFill>
-            <a:srgbClr val="F9F1F5"/>
+            <a:srgbClr val="F0EEFC"/>
           </a:solidFill>
           <a:ln w="12700">
             <a:solidFill>
-              <a:srgbClr val="EED3E0"/>
+              <a:srgbClr val="D7D1FA"/>
             </a:solidFill>
           </a:ln>
         </p:spPr>
@@ -4100,7 +4100,7 @@
     <p:bg>
       <p:bgPr>
         <a:solidFill>
-          <a:srgbClr val="B8618C"/>
+          <a:srgbClr val="3D26C5"/>
         </a:solidFill>
         <a:effectLst/>
       </p:bgPr>
@@ -4173,7 +4173,7 @@
             <a:r>
               <a:rPr sz="3000" b="1" i="0">
                 <a:solidFill>
-                  <a:srgbClr val="7B3759"/>
+                  <a:srgbClr val="1D115F"/>
                 </a:solidFill>
               </a:rPr>
               <a:t>답례 안내</a:t>
@@ -4198,11 +4198,11 @@
             </a:avLst>
           </a:prstGeom>
           <a:solidFill>
-            <a:srgbClr val="F9F1F5"/>
+            <a:srgbClr val="F0EEFC"/>
           </a:solidFill>
           <a:ln w="15875">
             <a:solidFill>
-              <a:srgbClr val="EED3E0"/>
+              <a:srgbClr val="D7D1FA"/>
             </a:solidFill>
           </a:ln>
         </p:spPr>
@@ -4229,7 +4229,7 @@
             <a:avLst/>
           </a:prstGeom>
           <a:solidFill>
-            <a:srgbClr val="B8618C"/>
+            <a:srgbClr val="3D26C5"/>
           </a:solidFill>
           <a:ln>
             <a:noFill/>
@@ -4287,7 +4287,7 @@
             <a:r>
               <a:rPr sz="1800" b="1" i="0">
                 <a:solidFill>
-                  <a:srgbClr val="7B3759"/>
+                  <a:srgbClr val="1D115F"/>
                 </a:solidFill>
               </a:rPr>
               <a:t>답례품</a:t>
@@ -4350,11 +4350,11 @@
             </a:avLst>
           </a:prstGeom>
           <a:solidFill>
-            <a:srgbClr val="F9F1F5"/>
+            <a:srgbClr val="F0EEFC"/>
           </a:solidFill>
           <a:ln w="15875">
             <a:solidFill>
-              <a:srgbClr val="EED3E0"/>
+              <a:srgbClr val="D7D1FA"/>
             </a:solidFill>
           </a:ln>
         </p:spPr>
@@ -4381,7 +4381,7 @@
             <a:avLst/>
           </a:prstGeom>
           <a:solidFill>
-            <a:srgbClr val="B8618C"/>
+            <a:srgbClr val="3D26C5"/>
           </a:solidFill>
           <a:ln>
             <a:noFill/>
@@ -4439,7 +4439,7 @@
             <a:r>
               <a:rPr sz="1800" b="1" i="0">
                 <a:solidFill>
-                  <a:srgbClr val="7B3759"/>
+                  <a:srgbClr val="1D115F"/>
                 </a:solidFill>
               </a:rPr>
               <a:t>방명록</a:t>
@@ -4502,11 +4502,11 @@
             </a:avLst>
           </a:prstGeom>
           <a:solidFill>
-            <a:srgbClr val="F9F1F5"/>
+            <a:srgbClr val="F0EEFC"/>
           </a:solidFill>
           <a:ln w="15875">
             <a:solidFill>
-              <a:srgbClr val="EED3E0"/>
+              <a:srgbClr val="D7D1FA"/>
             </a:solidFill>
           </a:ln>
         </p:spPr>
@@ -4533,7 +4533,7 @@
             <a:avLst/>
           </a:prstGeom>
           <a:solidFill>
-            <a:srgbClr val="B8618C"/>
+            <a:srgbClr val="3D26C5"/>
           </a:solidFill>
           <a:ln>
             <a:noFill/>
@@ -4591,7 +4591,7 @@
             <a:r>
               <a:rPr sz="1800" b="1" i="0">
                 <a:solidFill>
-                  <a:srgbClr val="7B3759"/>
+                  <a:srgbClr val="1D115F"/>
                 </a:solidFill>
               </a:rPr>
               <a:t>사진 · 영상</a:t>
@@ -4651,7 +4651,7 @@
     <p:bg>
       <p:bgPr>
         <a:solidFill>
-          <a:srgbClr val="B8618C"/>
+          <a:srgbClr val="3D26C5"/>
         </a:solidFill>
         <a:effectLst/>
       </p:bgPr>
@@ -4724,7 +4724,7 @@
             <a:r>
               <a:rPr sz="3000" b="1" i="0">
                 <a:solidFill>
-                  <a:srgbClr val="7B3759"/>
+                  <a:srgbClr val="1D115F"/>
                 </a:solidFill>
               </a:rPr>
               <a:t>웨딩 사진</a:t>
@@ -4749,11 +4749,11 @@
             </a:avLst>
           </a:prstGeom>
           <a:solidFill>
-            <a:srgbClr val="EED3E0"/>
+            <a:srgbClr val="D7D1FA"/>
           </a:solidFill>
           <a:ln w="19050">
             <a:solidFill>
-              <a:srgbClr val="B8618C"/>
+              <a:srgbClr val="3D26C5"/>
             </a:solidFill>
             <a:prstDash val="dash"/>
           </a:ln>
@@ -4772,7 +4772,7 @@
             <a:r>
               <a:rPr sz="1200" b="0" i="0">
                 <a:solidFill>
-                  <a:srgbClr val="7B3759"/>
+                  <a:srgbClr val="1D115F"/>
                 </a:solidFill>
               </a:rPr>
               <a:t>사진 1</a:t>
@@ -4797,11 +4797,11 @@
             </a:avLst>
           </a:prstGeom>
           <a:solidFill>
-            <a:srgbClr val="EED3E0"/>
+            <a:srgbClr val="D7D1FA"/>
           </a:solidFill>
           <a:ln w="19050">
             <a:solidFill>
-              <a:srgbClr val="B8618C"/>
+              <a:srgbClr val="3D26C5"/>
             </a:solidFill>
             <a:prstDash val="dash"/>
           </a:ln>
@@ -4820,7 +4820,7 @@
             <a:r>
               <a:rPr sz="1200" b="0" i="0">
                 <a:solidFill>
-                  <a:srgbClr val="7B3759"/>
+                  <a:srgbClr val="1D115F"/>
                 </a:solidFill>
               </a:rPr>
               <a:t>사진 2</a:t>
@@ -4845,11 +4845,11 @@
             </a:avLst>
           </a:prstGeom>
           <a:solidFill>
-            <a:srgbClr val="EED3E0"/>
+            <a:srgbClr val="D7D1FA"/>
           </a:solidFill>
           <a:ln w="19050">
             <a:solidFill>
-              <a:srgbClr val="B8618C"/>
+              <a:srgbClr val="3D26C5"/>
             </a:solidFill>
             <a:prstDash val="dash"/>
           </a:ln>
@@ -4868,7 +4868,7 @@
             <a:r>
               <a:rPr sz="1200" b="0" i="0">
                 <a:solidFill>
-                  <a:srgbClr val="7B3759"/>
+                  <a:srgbClr val="1D115F"/>
                 </a:solidFill>
               </a:rPr>
               <a:t>사진 3</a:t>
@@ -4893,11 +4893,11 @@
             </a:avLst>
           </a:prstGeom>
           <a:solidFill>
-            <a:srgbClr val="EED3E0"/>
+            <a:srgbClr val="D7D1FA"/>
           </a:solidFill>
           <a:ln w="19050">
             <a:solidFill>
-              <a:srgbClr val="B8618C"/>
+              <a:srgbClr val="3D26C5"/>
             </a:solidFill>
             <a:prstDash val="dash"/>
           </a:ln>
@@ -4916,7 +4916,7 @@
             <a:r>
               <a:rPr sz="1200" b="0" i="0">
                 <a:solidFill>
-                  <a:srgbClr val="7B3759"/>
+                  <a:srgbClr val="1D115F"/>
                 </a:solidFill>
               </a:rPr>
               <a:t>사진 4</a:t>
@@ -4941,11 +4941,11 @@
             </a:avLst>
           </a:prstGeom>
           <a:solidFill>
-            <a:srgbClr val="EED3E0"/>
+            <a:srgbClr val="D7D1FA"/>
           </a:solidFill>
           <a:ln w="19050">
             <a:solidFill>
-              <a:srgbClr val="B8618C"/>
+              <a:srgbClr val="3D26C5"/>
             </a:solidFill>
             <a:prstDash val="dash"/>
           </a:ln>
@@ -4964,7 +4964,7 @@
             <a:r>
               <a:rPr sz="1200" b="0" i="0">
                 <a:solidFill>
-                  <a:srgbClr val="7B3759"/>
+                  <a:srgbClr val="1D115F"/>
                 </a:solidFill>
               </a:rPr>
               <a:t>사진 5</a:t>
@@ -4989,11 +4989,11 @@
             </a:avLst>
           </a:prstGeom>
           <a:solidFill>
-            <a:srgbClr val="EED3E0"/>
+            <a:srgbClr val="D7D1FA"/>
           </a:solidFill>
           <a:ln w="19050">
             <a:solidFill>
-              <a:srgbClr val="B8618C"/>
+              <a:srgbClr val="3D26C5"/>
             </a:solidFill>
             <a:prstDash val="dash"/>
           </a:ln>
@@ -5012,7 +5012,7 @@
             <a:r>
               <a:rPr sz="1200" b="0" i="0">
                 <a:solidFill>
-                  <a:srgbClr val="7B3759"/>
+                  <a:srgbClr val="1D115F"/>
                 </a:solidFill>
               </a:rPr>
               <a:t>사진 6</a:t>
@@ -5092,7 +5092,7 @@
             <a:r>
               <a:rPr sz="3400" b="1" i="0">
                 <a:solidFill>
-                  <a:srgbClr val="7B3759"/>
+                  <a:srgbClr val="1D115F"/>
                 </a:solidFill>
               </a:rPr>
               <a:t>와 주셔서 고맙습니다</a:t>
@@ -5130,7 +5130,7 @@
             <a:r>
               <a:rPr sz="1700" b="0" i="1">
                 <a:solidFill>
-                  <a:srgbClr val="7B3759"/>
+                  <a:srgbClr val="1D115F"/>
                 </a:solidFill>
               </a:rPr>
               <a:t>잘 살겠습니다</a:t>
@@ -5195,34 +5195,34 @@
         <a:sysClr val="window" lastClr="FFFFFF"/>
       </a:lt1>
       <a:dk2>
-        <a:srgbClr val="7B3759"/>
+        <a:srgbClr val="1D115F"/>
       </a:dk2>
       <a:lt2>
-        <a:srgbClr val="F9F1F5"/>
+        <a:srgbClr val="F0EEFC"/>
       </a:lt2>
       <a:accent1>
-        <a:srgbClr val="B8618C"/>
+        <a:srgbClr val="3D26C5"/>
       </a:accent1>
       <a:accent2>
-        <a:srgbClr val="3F8D3F"/>
+        <a:srgbClr val="209DB6"/>
       </a:accent2>
       <a:accent3>
-        <a:srgbClr val="7B3759"/>
+        <a:srgbClr val="1D115F"/>
       </a:accent3>
       <a:accent4>
-        <a:srgbClr val="EED3E0"/>
+        <a:srgbClr val="D7D1FA"/>
       </a:accent4>
       <a:accent5>
-        <a:srgbClr val="7C7766"/>
+        <a:srgbClr val="2E62BE"/>
       </a:accent5>
       <a:accent6>
-        <a:srgbClr val="B0879B"/>
+        <a:srgbClr val="77709F"/>
       </a:accent6>
       <a:hlink>
-        <a:srgbClr val="B8618C"/>
+        <a:srgbClr val="3D26C5"/>
       </a:hlink>
       <a:folHlink>
-        <a:srgbClr val="7B3759"/>
+        <a:srgbClr val="1D115F"/>
       </a:folHlink>
     </a:clrScheme>
     <a:fontScheme name="Office">

--- a/public/fun/pack/pptx/wedding/결혼식_25_감사·답례중심_연꽃연못.pptx
+++ b/public/fun/pack/pptx/wedding/결혼식_25_감사·답례중심_연꽃연못.pptx
@@ -3286,6 +3286,14 @@
 <file path=ppt/slides/slide1.xml><?xml version="1.0" encoding="utf-8"?>
 <p:sld xmlns:a="http://schemas.openxmlformats.org/drawingml/2006/main" xmlns:p="http://schemas.openxmlformats.org/presentationml/2006/main" xmlns:r="http://schemas.openxmlformats.org/officeDocument/2006/relationships">
   <p:cSld>
+    <p:bg>
+      <p:bgPr>
+        <a:solidFill>
+          <a:srgbClr val="FDEAF4"/>
+        </a:solidFill>
+        <a:effectLst/>
+      </p:bgPr>
+    </p:bg>
     <p:spTree>
       <p:nvGrpSpPr>
         <p:cNvPr id="1" name=""/>
@@ -3293,30 +3301,116 @@
         <p:nvPr/>
       </p:nvGrpSpPr>
       <p:grpSpPr/>
-      <p:pic>
-        <p:nvPicPr>
-          <p:cNvPr id="3" name="표지 그림" descr="wedding-25.jpg"/>
-          <p:cNvPicPr>
-            <a:picLocks noChangeAspect="1"/>
-          </p:cNvPicPr>
+      <p:sp>
+        <p:nvSpPr>
+          <p:cNvPr id="3" name="사진 자리"/>
+          <p:cNvSpPr/>
           <p:nvPr/>
-        </p:nvPicPr>
-        <p:blipFill>
-          <a:blip r:embed="rId2"/>
-          <a:stretch>
-            <a:fillRect/>
-          </a:stretch>
-        </p:blipFill>
-        <p:spPr>
-          <a:xfrm>
-            <a:off x="0" y="0"/>
-            <a:ext cx="12191695" cy="6858000"/>
+        </p:nvSpPr>
+        <p:spPr>
+          <a:xfrm>
+            <a:off x="7802684" y="0"/>
+            <a:ext cx="4389010" cy="6858000"/>
           </a:xfrm>
           <a:prstGeom prst="rect">
             <a:avLst/>
           </a:prstGeom>
-        </p:spPr>
-      </p:pic>
+          <a:solidFill>
+            <a:srgbClr val="F3A5CC"/>
+          </a:solidFill>
+          <a:ln>
+            <a:noFill/>
+          </a:ln>
+        </p:spPr>
+        <p:txBody>
+          <a:bodyPr rtlCol="0" anchor="ctr" wrap="square" lIns="54864" rIns="54864" tIns="27432" bIns="27432">
+            <a:noAutofit/>
+          </a:bodyPr>
+          <a:lstStyle/>
+          <a:p>
+            <a:pPr algn="ctr">
+              <a:lnSpc>
+                <a:spcPct val="100000"/>
+              </a:lnSpc>
+            </a:pPr>
+            <a:r>
+              <a:rPr sz="1400" b="0" i="0">
+                <a:solidFill>
+                  <a:srgbClr val="492738"/>
+                </a:solidFill>
+              </a:rPr>
+              <a:t>사진을 넣어 주세요</a:t>
+            </a:r>
+          </a:p>
+        </p:txBody>
+      </p:sp>
+      <p:sp>
+        <p:nvSpPr>
+          <p:cNvPr id="4" name="장식"/>
+          <p:cNvSpPr/>
+          <p:nvPr/>
+        </p:nvSpPr>
+        <p:spPr>
+          <a:xfrm>
+            <a:off x="8168435" y="365760"/>
+            <a:ext cx="3657508" cy="6126480"/>
+          </a:xfrm>
+          <a:prstGeom prst="rect">
+            <a:avLst/>
+          </a:prstGeom>
+          <a:noFill/>
+          <a:ln w="9525">
+            <a:solidFill>
+              <a:srgbClr val="26231F"/>
+            </a:solidFill>
+          </a:ln>
+        </p:spPr>
+        <p:txBody>
+          <a:bodyPr rtlCol="0" anchor="ctr"/>
+          <a:lstStyle/>
+          <a:p>
+            <a:pPr algn="ctr"/>
+          </a:p>
+        </p:txBody>
+      </p:sp>
+      <p:sp>
+        <p:nvSpPr>
+          <p:cNvPr id="5" name="라벨"/>
+          <p:cNvSpPr txBox="1"/>
+          <p:nvPr/>
+        </p:nvSpPr>
+        <p:spPr>
+          <a:xfrm>
+            <a:off x="822960" y="2148840"/>
+            <a:ext cx="5608179" cy="274320"/>
+          </a:xfrm>
+          <a:prstGeom prst="rect">
+            <a:avLst/>
+          </a:prstGeom>
+          <a:noFill/>
+        </p:spPr>
+        <p:txBody>
+          <a:bodyPr wrap="square" lIns="54864" rIns="54864" tIns="27432" bIns="27432" anchor="t">
+            <a:noAutofit/>
+          </a:bodyPr>
+          <a:lstStyle/>
+          <a:p>
+            <a:pPr algn="l">
+              <a:lnSpc>
+                <a:spcPct val="115000"/>
+              </a:lnSpc>
+            </a:pPr>
+            <a:r>
+              <a:rPr sz="1000" b="1" i="0" spc="250">
+                <a:solidFill>
+                  <a:srgbClr val="26231F"/>
+                </a:solidFill>
+              </a:rPr>
+              <a:t>WEDDING</a:t>
+            </a:r>
+          </a:p>
+        </p:txBody>
+      </p:sp>
       <p:sp>
         <p:nvSpPr>
           <p:cNvPr id="2" name="Title 1"/>
@@ -3329,8 +3423,8 @@
         </p:nvSpPr>
         <p:spPr>
           <a:xfrm>
-            <a:off x="853418" y="2057400"/>
-            <a:ext cx="6095847" cy="1554480"/>
+            <a:off x="822960" y="2606040"/>
+            <a:ext cx="5608179" cy="1188720"/>
           </a:xfrm>
         </p:spPr>
         <p:txBody>
@@ -3347,7 +3441,7 @@
             <a:r>
               <a:rPr sz="3600" b="1" i="0">
                 <a:solidFill>
-                  <a:srgbClr val="1D115F"/>
+                  <a:srgbClr val="26231F"/>
                 </a:solidFill>
               </a:rPr>
               <a:t>저희 결혼합니다</a:t>
@@ -3357,14 +3451,14 @@
       </p:sp>
       <p:sp>
         <p:nvSpPr>
-          <p:cNvPr id="4" name="한 줄 문구"/>
+          <p:cNvPr id="6" name="한 줄 문구"/>
           <p:cNvSpPr txBox="1"/>
           <p:nvPr/>
         </p:nvSpPr>
         <p:spPr>
           <a:xfrm>
-            <a:off x="853418" y="3749039"/>
-            <a:ext cx="6095847" cy="822960"/>
+            <a:off x="822960" y="3886200"/>
+            <a:ext cx="5608179" cy="822960"/>
           </a:xfrm>
           <a:prstGeom prst="rect">
             <a:avLst/>
@@ -3383,9 +3477,9 @@
               </a:lnSpc>
             </a:pPr>
             <a:r>
-              <a:rPr sz="1700" b="0" i="1">
-                <a:solidFill>
-                  <a:srgbClr val="1D115F"/>
+              <a:rPr sz="1700" b="0" i="0">
+                <a:solidFill>
+                  <a:srgbClr val="26231F"/>
                 </a:solidFill>
               </a:rPr>
               <a:t>더운 날 와 주셔서 고맙습니다</a:t>
@@ -3395,14 +3489,14 @@
       </p:sp>
       <p:sp>
         <p:nvSpPr>
-          <p:cNvPr id="5" name="안내 문구"/>
+          <p:cNvPr id="7" name="안내 문구"/>
           <p:cNvSpPr txBox="1"/>
           <p:nvPr/>
         </p:nvSpPr>
         <p:spPr>
           <a:xfrm>
-            <a:off x="853418" y="4617720"/>
-            <a:ext cx="6095847" cy="914400"/>
+            <a:off x="822960" y="4754880"/>
+            <a:ext cx="5608179" cy="914400"/>
           </a:xfrm>
           <a:prstGeom prst="rect">
             <a:avLst/>
@@ -3423,7 +3517,7 @@
             <a:r>
               <a:rPr sz="1400" b="0" i="0">
                 <a:solidFill>
-                  <a:srgbClr val="666666"/>
+                  <a:srgbClr val="26231F"/>
                 </a:solidFill>
               </a:rPr>
               <a:t>신랑 이름 ♥ 신부 이름</a:t>
@@ -3438,10 +3532,10 @@
             <a:r>
               <a:rPr sz="1400" b="0" i="0">
                 <a:solidFill>
-                  <a:srgbClr val="666666"/>
+                  <a:srgbClr val="26231F"/>
                 </a:solidFill>
               </a:rPr>
-              <a:t>2027. 00. 00 · 예식장 이름</a:t>
+              <a:t>날짜 입력 · 예식장 이름</a:t>
             </a:r>
           </a:p>
         </p:txBody>
@@ -3460,7 +3554,7 @@
     <p:bg>
       <p:bgPr>
         <a:solidFill>
-          <a:srgbClr val="3D26C5"/>
+          <a:srgbClr val="FDEAF4"/>
         </a:solidFill>
         <a:effectLst/>
       </p:bgPr>
@@ -3480,16 +3574,14 @@
         </p:nvSpPr>
         <p:spPr>
           <a:xfrm>
-            <a:off x="274320" y="274320"/>
-            <a:ext cx="11643055" cy="6309360"/>
-          </a:xfrm>
-          <a:prstGeom prst="roundRect">
-            <a:avLst>
-              <a:gd name="adj" fmla="val 3500"/>
-            </a:avLst>
+            <a:off x="640080" y="566928"/>
+            <a:ext cx="10911535" cy="10972"/>
+          </a:xfrm>
+          <a:prstGeom prst="rect">
+            <a:avLst/>
           </a:prstGeom>
           <a:solidFill>
-            <a:srgbClr val="FFFFFF"/>
+            <a:srgbClr val="26231F"/>
           </a:solidFill>
           <a:ln>
             <a:noFill/>
@@ -3505,6 +3597,73 @@
       </p:sp>
       <p:sp>
         <p:nvSpPr>
+          <p:cNvPr id="4" name="상단 라벨"/>
+          <p:cNvSpPr txBox="1"/>
+          <p:nvPr/>
+        </p:nvSpPr>
+        <p:spPr>
+          <a:xfrm>
+            <a:off x="640080" y="237744"/>
+            <a:ext cx="5486400" cy="274320"/>
+          </a:xfrm>
+          <a:prstGeom prst="rect">
+            <a:avLst/>
+          </a:prstGeom>
+          <a:noFill/>
+        </p:spPr>
+        <p:txBody>
+          <a:bodyPr wrap="square" lIns="54864" rIns="54864" tIns="27432" bIns="27432" anchor="ctr">
+            <a:noAutofit/>
+          </a:bodyPr>
+          <a:lstStyle/>
+          <a:p>
+            <a:pPr algn="l">
+              <a:lnSpc>
+                <a:spcPct val="115000"/>
+              </a:lnSpc>
+            </a:pPr>
+            <a:r>
+              <a:rPr sz="900" b="1" i="0" spc="250">
+                <a:solidFill>
+                  <a:srgbClr val="26231F"/>
+                </a:solidFill>
+              </a:rPr>
+              <a:t>WEDDING</a:t>
+            </a:r>
+          </a:p>
+        </p:txBody>
+      </p:sp>
+      <p:sp>
+        <p:nvSpPr>
+          <p:cNvPr id="5" name="포인트"/>
+          <p:cNvSpPr/>
+          <p:nvPr/>
+        </p:nvSpPr>
+        <p:spPr>
+          <a:xfrm>
+            <a:off x="11204143" y="246888"/>
+            <a:ext cx="237744" cy="237744"/>
+          </a:xfrm>
+          <a:prstGeom prst="sun">
+            <a:avLst/>
+          </a:prstGeom>
+          <a:solidFill>
+            <a:srgbClr val="EA7BB3"/>
+          </a:solidFill>
+          <a:ln>
+            <a:noFill/>
+          </a:ln>
+        </p:spPr>
+        <p:txBody>
+          <a:bodyPr rtlCol="0" anchor="ctr"/>
+          <a:lstStyle/>
+          <a:p>
+            <a:pPr algn="ctr"/>
+          </a:p>
+        </p:txBody>
+      </p:sp>
+      <p:sp>
+        <p:nvSpPr>
           <p:cNvPr id="2" name="Title 1"/>
           <p:cNvSpPr>
             <a:spLocks noGrp="1"/>
@@ -3515,8 +3674,8 @@
         </p:nvSpPr>
         <p:spPr>
           <a:xfrm>
-            <a:off x="731520" y="548640"/>
-            <a:ext cx="9448495" cy="868680"/>
+            <a:off x="640080" y="731520"/>
+            <a:ext cx="10911535" cy="822960"/>
           </a:xfrm>
         </p:spPr>
         <p:txBody>
@@ -3533,7 +3692,7 @@
             <a:r>
               <a:rPr sz="3000" b="1" i="0">
                 <a:solidFill>
-                  <a:srgbClr val="1D115F"/>
+                  <a:srgbClr val="26231F"/>
                 </a:solidFill>
               </a:rPr>
               <a:t>신랑 · 신부 소개</a:t>
@@ -3543,25 +3702,23 @@
       </p:sp>
       <p:sp>
         <p:nvSpPr>
-          <p:cNvPr id="4" name="사진 자리"/>
+          <p:cNvPr id="6" name="사진 자리"/>
           <p:cNvSpPr/>
           <p:nvPr/>
         </p:nvSpPr>
         <p:spPr>
           <a:xfrm>
-            <a:off x="2030653" y="1600200"/>
-            <a:ext cx="2308860" cy="2308860"/>
+            <a:off x="1996363" y="1783080"/>
+            <a:ext cx="2286000" cy="2286000"/>
           </a:xfrm>
           <a:prstGeom prst="ellipse">
             <a:avLst/>
           </a:prstGeom>
           <a:solidFill>
-            <a:srgbClr val="D7D1FA"/>
+            <a:srgbClr val="FAD1E6"/>
           </a:solidFill>
           <a:ln w="19050">
-            <a:solidFill>
-              <a:srgbClr val="3D26C5"/>
-            </a:solidFill>
+            <a:noFill/>
             <a:prstDash val="dash"/>
           </a:ln>
         </p:spPr>
@@ -3579,7 +3736,7 @@
             <a:r>
               <a:rPr sz="1200" b="0" i="0">
                 <a:solidFill>
-                  <a:srgbClr val="1D115F"/>
+                  <a:srgbClr val="8E8780"/>
                 </a:solidFill>
               </a:rPr>
               <a:t>사진</a:t>
@@ -3589,14 +3746,14 @@
       </p:sp>
       <p:sp>
         <p:nvSpPr>
-          <p:cNvPr id="5" name="TextBox 4"/>
+          <p:cNvPr id="7" name="TextBox 6"/>
           <p:cNvSpPr txBox="1"/>
           <p:nvPr/>
         </p:nvSpPr>
         <p:spPr>
           <a:xfrm>
-            <a:off x="731520" y="4000500"/>
-            <a:ext cx="4907127" cy="411480"/>
+            <a:off x="640080" y="4160520"/>
+            <a:ext cx="4998567" cy="411480"/>
           </a:xfrm>
           <a:prstGeom prst="rect">
             <a:avLst/>
@@ -3617,7 +3774,7 @@
             <a:r>
               <a:rPr sz="1600" b="1" i="0">
                 <a:solidFill>
-                  <a:srgbClr val="1D115F"/>
+                  <a:srgbClr val="492738"/>
                 </a:solidFill>
               </a:rPr>
               <a:t>신랑</a:t>
@@ -3627,14 +3784,14 @@
       </p:sp>
       <p:sp>
         <p:nvSpPr>
-          <p:cNvPr id="6" name="TextBox 5"/>
+          <p:cNvPr id="8" name="TextBox 7"/>
           <p:cNvSpPr txBox="1"/>
           <p:nvPr/>
         </p:nvSpPr>
         <p:spPr>
           <a:xfrm>
-            <a:off x="822960" y="4457700"/>
-            <a:ext cx="4724247" cy="1760219"/>
+            <a:off x="731519" y="4617720"/>
+            <a:ext cx="4815687" cy="1737360"/>
           </a:xfrm>
           <a:prstGeom prst="rect">
             <a:avLst/>
@@ -3695,25 +3852,23 @@
       </p:sp>
       <p:sp>
         <p:nvSpPr>
-          <p:cNvPr id="7" name="사진 자리"/>
+          <p:cNvPr id="9" name="사진 자리"/>
           <p:cNvSpPr/>
           <p:nvPr/>
         </p:nvSpPr>
         <p:spPr>
           <a:xfrm>
-            <a:off x="7852181" y="1600200"/>
-            <a:ext cx="2308860" cy="2308860"/>
+            <a:off x="7909331" y="1783080"/>
+            <a:ext cx="2286000" cy="2286000"/>
           </a:xfrm>
           <a:prstGeom prst="ellipse">
             <a:avLst/>
           </a:prstGeom>
           <a:solidFill>
-            <a:srgbClr val="D7D1FA"/>
+            <a:srgbClr val="FAD1E6"/>
           </a:solidFill>
           <a:ln w="19050">
-            <a:solidFill>
-              <a:srgbClr val="3D26C5"/>
-            </a:solidFill>
+            <a:noFill/>
             <a:prstDash val="dash"/>
           </a:ln>
         </p:spPr>
@@ -3731,7 +3886,7 @@
             <a:r>
               <a:rPr sz="1200" b="0" i="0">
                 <a:solidFill>
-                  <a:srgbClr val="1D115F"/>
+                  <a:srgbClr val="8E8780"/>
                 </a:solidFill>
               </a:rPr>
               <a:t>사진</a:t>
@@ -3741,14 +3896,14 @@
       </p:sp>
       <p:sp>
         <p:nvSpPr>
-          <p:cNvPr id="8" name="TextBox 7"/>
+          <p:cNvPr id="10" name="TextBox 9"/>
           <p:cNvSpPr txBox="1"/>
           <p:nvPr/>
         </p:nvSpPr>
         <p:spPr>
           <a:xfrm>
-            <a:off x="6553047" y="4000500"/>
-            <a:ext cx="4907127" cy="411480"/>
+            <a:off x="6553047" y="4160520"/>
+            <a:ext cx="4998567" cy="411480"/>
           </a:xfrm>
           <a:prstGeom prst="rect">
             <a:avLst/>
@@ -3769,7 +3924,7 @@
             <a:r>
               <a:rPr sz="1600" b="1" i="0">
                 <a:solidFill>
-                  <a:srgbClr val="1D115F"/>
+                  <a:srgbClr val="492738"/>
                 </a:solidFill>
               </a:rPr>
               <a:t>신부</a:t>
@@ -3779,14 +3934,14 @@
       </p:sp>
       <p:sp>
         <p:nvSpPr>
-          <p:cNvPr id="9" name="TextBox 8"/>
+          <p:cNvPr id="11" name="TextBox 10"/>
           <p:cNvSpPr txBox="1"/>
           <p:nvPr/>
         </p:nvSpPr>
         <p:spPr>
           <a:xfrm>
-            <a:off x="6644487" y="4457700"/>
-            <a:ext cx="4724247" cy="1760219"/>
+            <a:off x="6644487" y="4617720"/>
+            <a:ext cx="4815687" cy="1737360"/>
           </a:xfrm>
           <a:prstGeom prst="rect">
             <a:avLst/>
@@ -3859,7 +4014,7 @@
     <p:bg>
       <p:bgPr>
         <a:solidFill>
-          <a:srgbClr val="3D26C5"/>
+          <a:srgbClr val="FDEAF4"/>
         </a:solidFill>
         <a:effectLst/>
       </p:bgPr>
@@ -3879,16 +4034,14 @@
         </p:nvSpPr>
         <p:spPr>
           <a:xfrm>
-            <a:off x="274320" y="274320"/>
-            <a:ext cx="11643055" cy="6309360"/>
-          </a:xfrm>
-          <a:prstGeom prst="roundRect">
-            <a:avLst>
-              <a:gd name="adj" fmla="val 3500"/>
-            </a:avLst>
+            <a:off x="640080" y="566928"/>
+            <a:ext cx="10911535" cy="10972"/>
+          </a:xfrm>
+          <a:prstGeom prst="rect">
+            <a:avLst/>
           </a:prstGeom>
           <a:solidFill>
-            <a:srgbClr val="FFFFFF"/>
+            <a:srgbClr val="26231F"/>
           </a:solidFill>
           <a:ln>
             <a:noFill/>
@@ -3904,6 +4057,73 @@
       </p:sp>
       <p:sp>
         <p:nvSpPr>
+          <p:cNvPr id="4" name="상단 라벨"/>
+          <p:cNvSpPr txBox="1"/>
+          <p:nvPr/>
+        </p:nvSpPr>
+        <p:spPr>
+          <a:xfrm>
+            <a:off x="640080" y="237744"/>
+            <a:ext cx="5486400" cy="274320"/>
+          </a:xfrm>
+          <a:prstGeom prst="rect">
+            <a:avLst/>
+          </a:prstGeom>
+          <a:noFill/>
+        </p:spPr>
+        <p:txBody>
+          <a:bodyPr wrap="square" lIns="54864" rIns="54864" tIns="27432" bIns="27432" anchor="ctr">
+            <a:noAutofit/>
+          </a:bodyPr>
+          <a:lstStyle/>
+          <a:p>
+            <a:pPr algn="l">
+              <a:lnSpc>
+                <a:spcPct val="115000"/>
+              </a:lnSpc>
+            </a:pPr>
+            <a:r>
+              <a:rPr sz="900" b="1" i="0" spc="250">
+                <a:solidFill>
+                  <a:srgbClr val="26231F"/>
+                </a:solidFill>
+              </a:rPr>
+              <a:t>WEDDING</a:t>
+            </a:r>
+          </a:p>
+        </p:txBody>
+      </p:sp>
+      <p:sp>
+        <p:nvSpPr>
+          <p:cNvPr id="5" name="포인트"/>
+          <p:cNvSpPr/>
+          <p:nvPr/>
+        </p:nvSpPr>
+        <p:spPr>
+          <a:xfrm>
+            <a:off x="11204143" y="246888"/>
+            <a:ext cx="237744" cy="237744"/>
+          </a:xfrm>
+          <a:prstGeom prst="sun">
+            <a:avLst/>
+          </a:prstGeom>
+          <a:solidFill>
+            <a:srgbClr val="EA7BB3"/>
+          </a:solidFill>
+          <a:ln>
+            <a:noFill/>
+          </a:ln>
+        </p:spPr>
+        <p:txBody>
+          <a:bodyPr rtlCol="0" anchor="ctr"/>
+          <a:lstStyle/>
+          <a:p>
+            <a:pPr algn="ctr"/>
+          </a:p>
+        </p:txBody>
+      </p:sp>
+      <p:sp>
+        <p:nvSpPr>
           <p:cNvPr id="2" name="Title 1"/>
           <p:cNvSpPr>
             <a:spLocks noGrp="1"/>
@@ -3914,8 +4134,8 @@
         </p:nvSpPr>
         <p:spPr>
           <a:xfrm>
-            <a:off x="731520" y="548640"/>
-            <a:ext cx="9448495" cy="868680"/>
+            <a:off x="640080" y="731520"/>
+            <a:ext cx="10911535" cy="822960"/>
           </a:xfrm>
         </p:spPr>
         <p:txBody>
@@ -3932,7 +4152,7 @@
             <a:r>
               <a:rPr sz="3000" b="1" i="0">
                 <a:solidFill>
-                  <a:srgbClr val="1D115F"/>
+                  <a:srgbClr val="26231F"/>
                 </a:solidFill>
               </a:rPr>
               <a:t>감사의 말씀</a:t>
@@ -3942,27 +4162,25 @@
       </p:sp>
       <p:sp>
         <p:nvSpPr>
-          <p:cNvPr id="4" name="감사 글 칸"/>
+          <p:cNvPr id="6" name="감사 글 칸"/>
           <p:cNvSpPr/>
           <p:nvPr/>
         </p:nvSpPr>
         <p:spPr>
           <a:xfrm>
-            <a:off x="731520" y="1600200"/>
-            <a:ext cx="10728655" cy="4617720"/>
+            <a:off x="640080" y="1783080"/>
+            <a:ext cx="10911535" cy="4572000"/>
           </a:xfrm>
           <a:prstGeom prst="roundRect">
             <a:avLst>
-              <a:gd name="adj" fmla="val 8000"/>
+              <a:gd name="adj" fmla="val 4000"/>
             </a:avLst>
           </a:prstGeom>
           <a:solidFill>
-            <a:srgbClr val="F0EEFC"/>
+            <a:srgbClr val="FDEAF4"/>
           </a:solidFill>
-          <a:ln w="12700">
-            <a:solidFill>
-              <a:srgbClr val="D7D1FA"/>
-            </a:solidFill>
+          <a:ln>
+            <a:noFill/>
           </a:ln>
         </p:spPr>
         <p:txBody>
@@ -3975,14 +4193,43 @@
       </p:sp>
       <p:sp>
         <p:nvSpPr>
-          <p:cNvPr id="5" name="감사 글"/>
+          <p:cNvPr id="7" name="포인트 막대"/>
+          <p:cNvSpPr/>
+          <p:nvPr/>
+        </p:nvSpPr>
+        <p:spPr>
+          <a:xfrm>
+            <a:off x="640080" y="1892807"/>
+            <a:ext cx="54864" cy="4352544"/>
+          </a:xfrm>
+          <a:prstGeom prst="rect">
+            <a:avLst/>
+          </a:prstGeom>
+          <a:solidFill>
+            <a:srgbClr val="EA7BB3"/>
+          </a:solidFill>
+          <a:ln>
+            <a:noFill/>
+          </a:ln>
+        </p:spPr>
+        <p:txBody>
+          <a:bodyPr rtlCol="0" anchor="ctr"/>
+          <a:lstStyle/>
+          <a:p>
+            <a:pPr algn="ctr"/>
+          </a:p>
+        </p:txBody>
+      </p:sp>
+      <p:sp>
+        <p:nvSpPr>
+          <p:cNvPr id="8" name="감사 글"/>
           <p:cNvSpPr txBox="1"/>
           <p:nvPr/>
         </p:nvSpPr>
         <p:spPr>
           <a:xfrm>
-            <a:off x="1188720" y="1965960"/>
-            <a:ext cx="9814255" cy="3886200"/>
+            <a:off x="1097280" y="2148840"/>
+            <a:ext cx="9997135" cy="3840480"/>
           </a:xfrm>
           <a:prstGeom prst="rect">
             <a:avLst/>
@@ -4003,7 +4250,7 @@
             <a:r>
               <a:rPr sz="2000" b="0" i="0">
                 <a:solidFill>
-                  <a:srgbClr val="2B2B2B"/>
+                  <a:srgbClr val="26231F"/>
                 </a:solidFill>
               </a:rPr>
               <a:t>바쁘신 중에 와 주셔서 고맙습니다.</a:t>
@@ -4018,7 +4265,7 @@
             <a:r>
               <a:rPr sz="2000" b="0" i="0">
                 <a:solidFill>
-                  <a:srgbClr val="2B2B2B"/>
+                  <a:srgbClr val="26231F"/>
                 </a:solidFill>
               </a:rPr>
               <a:t/>
@@ -4033,7 +4280,7 @@
             <a:r>
               <a:rPr sz="2000" b="0" i="0">
                 <a:solidFill>
-                  <a:srgbClr val="2B2B2B"/>
+                  <a:srgbClr val="26231F"/>
                 </a:solidFill>
               </a:rPr>
               <a:t>보내 주신 마음 잊지 않고</a:t>
@@ -4048,7 +4295,7 @@
             <a:r>
               <a:rPr sz="2000" b="0" i="0">
                 <a:solidFill>
-                  <a:srgbClr val="2B2B2B"/>
+                  <a:srgbClr val="26231F"/>
                 </a:solidFill>
               </a:rPr>
               <a:t>잘 살겠습니다.</a:t>
@@ -4063,7 +4310,7 @@
             <a:r>
               <a:rPr sz="2000" b="0" i="0">
                 <a:solidFill>
-                  <a:srgbClr val="2B2B2B"/>
+                  <a:srgbClr val="26231F"/>
                 </a:solidFill>
               </a:rPr>
               <a:t/>
@@ -4078,7 +4325,7 @@
             <a:r>
               <a:rPr sz="2000" b="0" i="0">
                 <a:solidFill>
-                  <a:srgbClr val="2B2B2B"/>
+                  <a:srgbClr val="26231F"/>
                 </a:solidFill>
               </a:rPr>
               <a:t>신랑 · 신부 드림</a:t>
@@ -4100,7 +4347,7 @@
     <p:bg>
       <p:bgPr>
         <a:solidFill>
-          <a:srgbClr val="3D26C5"/>
+          <a:srgbClr val="FDEAF4"/>
         </a:solidFill>
         <a:effectLst/>
       </p:bgPr>
@@ -4120,16 +4367,14 @@
         </p:nvSpPr>
         <p:spPr>
           <a:xfrm>
-            <a:off x="274320" y="274320"/>
-            <a:ext cx="11643055" cy="6309360"/>
-          </a:xfrm>
-          <a:prstGeom prst="roundRect">
-            <a:avLst>
-              <a:gd name="adj" fmla="val 3500"/>
-            </a:avLst>
+            <a:off x="640080" y="566928"/>
+            <a:ext cx="10911535" cy="10972"/>
+          </a:xfrm>
+          <a:prstGeom prst="rect">
+            <a:avLst/>
           </a:prstGeom>
           <a:solidFill>
-            <a:srgbClr val="FFFFFF"/>
+            <a:srgbClr val="26231F"/>
           </a:solidFill>
           <a:ln>
             <a:noFill/>
@@ -4145,6 +4390,73 @@
       </p:sp>
       <p:sp>
         <p:nvSpPr>
+          <p:cNvPr id="4" name="상단 라벨"/>
+          <p:cNvSpPr txBox="1"/>
+          <p:nvPr/>
+        </p:nvSpPr>
+        <p:spPr>
+          <a:xfrm>
+            <a:off x="640080" y="237744"/>
+            <a:ext cx="5486400" cy="274320"/>
+          </a:xfrm>
+          <a:prstGeom prst="rect">
+            <a:avLst/>
+          </a:prstGeom>
+          <a:noFill/>
+        </p:spPr>
+        <p:txBody>
+          <a:bodyPr wrap="square" lIns="54864" rIns="54864" tIns="27432" bIns="27432" anchor="ctr">
+            <a:noAutofit/>
+          </a:bodyPr>
+          <a:lstStyle/>
+          <a:p>
+            <a:pPr algn="l">
+              <a:lnSpc>
+                <a:spcPct val="115000"/>
+              </a:lnSpc>
+            </a:pPr>
+            <a:r>
+              <a:rPr sz="900" b="1" i="0" spc="250">
+                <a:solidFill>
+                  <a:srgbClr val="26231F"/>
+                </a:solidFill>
+              </a:rPr>
+              <a:t>WEDDING</a:t>
+            </a:r>
+          </a:p>
+        </p:txBody>
+      </p:sp>
+      <p:sp>
+        <p:nvSpPr>
+          <p:cNvPr id="5" name="포인트"/>
+          <p:cNvSpPr/>
+          <p:nvPr/>
+        </p:nvSpPr>
+        <p:spPr>
+          <a:xfrm>
+            <a:off x="11204143" y="246888"/>
+            <a:ext cx="237744" cy="237744"/>
+          </a:xfrm>
+          <a:prstGeom prst="sun">
+            <a:avLst/>
+          </a:prstGeom>
+          <a:solidFill>
+            <a:srgbClr val="EA7BB3"/>
+          </a:solidFill>
+          <a:ln>
+            <a:noFill/>
+          </a:ln>
+        </p:spPr>
+        <p:txBody>
+          <a:bodyPr rtlCol="0" anchor="ctr"/>
+          <a:lstStyle/>
+          <a:p>
+            <a:pPr algn="ctr"/>
+          </a:p>
+        </p:txBody>
+      </p:sp>
+      <p:sp>
+        <p:nvSpPr>
           <p:cNvPr id="2" name="Title 1"/>
           <p:cNvSpPr>
             <a:spLocks noGrp="1"/>
@@ -4155,8 +4467,8 @@
         </p:nvSpPr>
         <p:spPr>
           <a:xfrm>
-            <a:off x="731520" y="548640"/>
-            <a:ext cx="9448495" cy="868680"/>
+            <a:off x="640080" y="731520"/>
+            <a:ext cx="10911535" cy="822960"/>
           </a:xfrm>
         </p:spPr>
         <p:txBody>
@@ -4173,7 +4485,7 @@
             <a:r>
               <a:rPr sz="3000" b="1" i="0">
                 <a:solidFill>
-                  <a:srgbClr val="1D115F"/>
+                  <a:srgbClr val="26231F"/>
                 </a:solidFill>
               </a:rPr>
               <a:t>답례 안내</a:t>
@@ -4183,27 +4495,25 @@
       </p:sp>
       <p:sp>
         <p:nvSpPr>
-          <p:cNvPr id="4" name="카드 1"/>
+          <p:cNvPr id="6" name="카드 1"/>
           <p:cNvSpPr/>
           <p:nvPr/>
         </p:nvSpPr>
         <p:spPr>
           <a:xfrm>
-            <a:off x="731520" y="1600200"/>
-            <a:ext cx="3423818" cy="4617720"/>
+            <a:off x="640080" y="1783080"/>
+            <a:ext cx="3484778" cy="4572000"/>
           </a:xfrm>
           <a:prstGeom prst="roundRect">
             <a:avLst>
-              <a:gd name="adj" fmla="val 8000"/>
+              <a:gd name="adj" fmla="val 4000"/>
             </a:avLst>
           </a:prstGeom>
           <a:solidFill>
-            <a:srgbClr val="F0EEFC"/>
+            <a:srgbClr val="FDEAF4"/>
           </a:solidFill>
-          <a:ln w="15875">
-            <a:solidFill>
-              <a:srgbClr val="D7D1FA"/>
-            </a:solidFill>
+          <a:ln>
+            <a:noFill/>
           </a:ln>
         </p:spPr>
         <p:txBody>
@@ -4216,20 +4526,49 @@
       </p:sp>
       <p:sp>
         <p:nvSpPr>
-          <p:cNvPr id="5" name="번호 1"/>
+          <p:cNvPr id="7" name="포인트 막대"/>
           <p:cNvSpPr/>
           <p:nvPr/>
         </p:nvSpPr>
         <p:spPr>
           <a:xfrm>
-            <a:off x="914400" y="1783080"/>
+            <a:off x="640080" y="1892807"/>
+            <a:ext cx="54864" cy="4352544"/>
+          </a:xfrm>
+          <a:prstGeom prst="rect">
+            <a:avLst/>
+          </a:prstGeom>
+          <a:solidFill>
+            <a:srgbClr val="EA7BB3"/>
+          </a:solidFill>
+          <a:ln>
+            <a:noFill/>
+          </a:ln>
+        </p:spPr>
+        <p:txBody>
+          <a:bodyPr rtlCol="0" anchor="ctr"/>
+          <a:lstStyle/>
+          <a:p>
+            <a:pPr algn="ctr"/>
+          </a:p>
+        </p:txBody>
+      </p:sp>
+      <p:sp>
+        <p:nvSpPr>
+          <p:cNvPr id="8" name="번호 1"/>
+          <p:cNvSpPr/>
+          <p:nvPr/>
+        </p:nvSpPr>
+        <p:spPr>
+          <a:xfrm>
+            <a:off x="822959" y="1965960"/>
             <a:ext cx="457200" cy="457200"/>
           </a:xfrm>
           <a:prstGeom prst="ellipse">
             <a:avLst/>
           </a:prstGeom>
           <a:solidFill>
-            <a:srgbClr val="3D26C5"/>
+            <a:srgbClr val="EA7BB3"/>
           </a:solidFill>
           <a:ln>
             <a:noFill/>
@@ -4249,7 +4588,7 @@
             <a:r>
               <a:rPr sz="1600" b="1" i="0">
                 <a:solidFill>
-                  <a:srgbClr val="FFFFFF"/>
+                  <a:srgbClr val="26231F"/>
                 </a:solidFill>
               </a:rPr>
               <a:t>1</a:t>
@@ -4259,14 +4598,14 @@
       </p:sp>
       <p:sp>
         <p:nvSpPr>
-          <p:cNvPr id="6" name="TextBox 5"/>
+          <p:cNvPr id="9" name="TextBox 8"/>
           <p:cNvSpPr txBox="1"/>
           <p:nvPr/>
         </p:nvSpPr>
         <p:spPr>
           <a:xfrm>
-            <a:off x="868680" y="2377440"/>
-            <a:ext cx="3149498" cy="640080"/>
+            <a:off x="777240" y="2560320"/>
+            <a:ext cx="3210458" cy="640080"/>
           </a:xfrm>
           <a:prstGeom prst="rect">
             <a:avLst/>
@@ -4287,7 +4626,7 @@
             <a:r>
               <a:rPr sz="1800" b="1" i="0">
                 <a:solidFill>
-                  <a:srgbClr val="1D115F"/>
+                  <a:srgbClr val="492738"/>
                 </a:solidFill>
               </a:rPr>
               <a:t>답례품</a:t>
@@ -4297,14 +4636,14 @@
       </p:sp>
       <p:sp>
         <p:nvSpPr>
-          <p:cNvPr id="7" name="TextBox 6"/>
+          <p:cNvPr id="10" name="TextBox 9"/>
           <p:cNvSpPr txBox="1"/>
           <p:nvPr/>
         </p:nvSpPr>
         <p:spPr>
           <a:xfrm>
-            <a:off x="868680" y="3063240"/>
-            <a:ext cx="3149498" cy="3017520"/>
+            <a:off x="777240" y="3246120"/>
+            <a:ext cx="3210458" cy="2971800"/>
           </a:xfrm>
           <a:prstGeom prst="rect">
             <a:avLst/>
@@ -4325,7 +4664,7 @@
             <a:r>
               <a:rPr sz="1500" b="0" i="0">
                 <a:solidFill>
-                  <a:srgbClr val="2B2B2B"/>
+                  <a:srgbClr val="26231F"/>
                 </a:solidFill>
               </a:rPr>
               <a:t>입력하세요</a:t>
@@ -4335,27 +4674,25 @@
       </p:sp>
       <p:sp>
         <p:nvSpPr>
-          <p:cNvPr id="8" name="카드 2"/>
+          <p:cNvPr id="11" name="카드 2"/>
           <p:cNvSpPr/>
           <p:nvPr/>
         </p:nvSpPr>
         <p:spPr>
           <a:xfrm>
-            <a:off x="4383938" y="1600200"/>
-            <a:ext cx="3423818" cy="4617720"/>
+            <a:off x="4353458" y="1783080"/>
+            <a:ext cx="3484778" cy="4572000"/>
           </a:xfrm>
           <a:prstGeom prst="roundRect">
             <a:avLst>
-              <a:gd name="adj" fmla="val 8000"/>
+              <a:gd name="adj" fmla="val 4000"/>
             </a:avLst>
           </a:prstGeom>
           <a:solidFill>
-            <a:srgbClr val="F0EEFC"/>
+            <a:srgbClr val="FDEAF4"/>
           </a:solidFill>
-          <a:ln w="15875">
-            <a:solidFill>
-              <a:srgbClr val="D7D1FA"/>
-            </a:solidFill>
+          <a:ln>
+            <a:noFill/>
           </a:ln>
         </p:spPr>
         <p:txBody>
@@ -4368,20 +4705,49 @@
       </p:sp>
       <p:sp>
         <p:nvSpPr>
-          <p:cNvPr id="9" name="번호 2"/>
+          <p:cNvPr id="12" name="포인트 막대"/>
           <p:cNvSpPr/>
           <p:nvPr/>
         </p:nvSpPr>
         <p:spPr>
           <a:xfrm>
-            <a:off x="4566818" y="1783080"/>
+            <a:off x="4353458" y="1892807"/>
+            <a:ext cx="54864" cy="4352544"/>
+          </a:xfrm>
+          <a:prstGeom prst="rect">
+            <a:avLst/>
+          </a:prstGeom>
+          <a:solidFill>
+            <a:srgbClr val="EA7BB3"/>
+          </a:solidFill>
+          <a:ln>
+            <a:noFill/>
+          </a:ln>
+        </p:spPr>
+        <p:txBody>
+          <a:bodyPr rtlCol="0" anchor="ctr"/>
+          <a:lstStyle/>
+          <a:p>
+            <a:pPr algn="ctr"/>
+          </a:p>
+        </p:txBody>
+      </p:sp>
+      <p:sp>
+        <p:nvSpPr>
+          <p:cNvPr id="13" name="번호 2"/>
+          <p:cNvSpPr/>
+          <p:nvPr/>
+        </p:nvSpPr>
+        <p:spPr>
+          <a:xfrm>
+            <a:off x="4536338" y="1965960"/>
             <a:ext cx="457200" cy="457200"/>
           </a:xfrm>
           <a:prstGeom prst="ellipse">
             <a:avLst/>
           </a:prstGeom>
           <a:solidFill>
-            <a:srgbClr val="3D26C5"/>
+            <a:srgbClr val="EA7BB3"/>
           </a:solidFill>
           <a:ln>
             <a:noFill/>
@@ -4401,7 +4767,7 @@
             <a:r>
               <a:rPr sz="1600" b="1" i="0">
                 <a:solidFill>
-                  <a:srgbClr val="FFFFFF"/>
+                  <a:srgbClr val="26231F"/>
                 </a:solidFill>
               </a:rPr>
               <a:t>2</a:t>
@@ -4411,14 +4777,14 @@
       </p:sp>
       <p:sp>
         <p:nvSpPr>
-          <p:cNvPr id="10" name="TextBox 9"/>
+          <p:cNvPr id="14" name="TextBox 13"/>
           <p:cNvSpPr txBox="1"/>
           <p:nvPr/>
         </p:nvSpPr>
         <p:spPr>
           <a:xfrm>
-            <a:off x="4521098" y="2377440"/>
-            <a:ext cx="3149498" cy="640080"/>
+            <a:off x="4490618" y="2560320"/>
+            <a:ext cx="3210458" cy="640080"/>
           </a:xfrm>
           <a:prstGeom prst="rect">
             <a:avLst/>
@@ -4439,7 +4805,7 @@
             <a:r>
               <a:rPr sz="1800" b="1" i="0">
                 <a:solidFill>
-                  <a:srgbClr val="1D115F"/>
+                  <a:srgbClr val="492738"/>
                 </a:solidFill>
               </a:rPr>
               <a:t>방명록</a:t>
@@ -4449,14 +4815,14 @@
       </p:sp>
       <p:sp>
         <p:nvSpPr>
-          <p:cNvPr id="11" name="TextBox 10"/>
+          <p:cNvPr id="15" name="TextBox 14"/>
           <p:cNvSpPr txBox="1"/>
           <p:nvPr/>
         </p:nvSpPr>
         <p:spPr>
           <a:xfrm>
-            <a:off x="4521098" y="3063240"/>
-            <a:ext cx="3149498" cy="3017520"/>
+            <a:off x="4490618" y="3246120"/>
+            <a:ext cx="3210458" cy="2971800"/>
           </a:xfrm>
           <a:prstGeom prst="rect">
             <a:avLst/>
@@ -4477,7 +4843,7 @@
             <a:r>
               <a:rPr sz="1500" b="0" i="0">
                 <a:solidFill>
-                  <a:srgbClr val="2B2B2B"/>
+                  <a:srgbClr val="26231F"/>
                 </a:solidFill>
               </a:rPr>
               <a:t>입력하세요</a:t>
@@ -4487,27 +4853,25 @@
       </p:sp>
       <p:sp>
         <p:nvSpPr>
-          <p:cNvPr id="12" name="카드 3"/>
+          <p:cNvPr id="16" name="카드 3"/>
           <p:cNvSpPr/>
           <p:nvPr/>
         </p:nvSpPr>
         <p:spPr>
           <a:xfrm>
-            <a:off x="8036356" y="1600200"/>
-            <a:ext cx="3423818" cy="4617720"/>
+            <a:off x="8066836" y="1783080"/>
+            <a:ext cx="3484778" cy="4572000"/>
           </a:xfrm>
           <a:prstGeom prst="roundRect">
             <a:avLst>
-              <a:gd name="adj" fmla="val 8000"/>
+              <a:gd name="adj" fmla="val 4000"/>
             </a:avLst>
           </a:prstGeom>
           <a:solidFill>
-            <a:srgbClr val="F0EEFC"/>
+            <a:srgbClr val="FDEAF4"/>
           </a:solidFill>
-          <a:ln w="15875">
-            <a:solidFill>
-              <a:srgbClr val="D7D1FA"/>
-            </a:solidFill>
+          <a:ln>
+            <a:noFill/>
           </a:ln>
         </p:spPr>
         <p:txBody>
@@ -4520,20 +4884,49 @@
       </p:sp>
       <p:sp>
         <p:nvSpPr>
-          <p:cNvPr id="13" name="번호 3"/>
+          <p:cNvPr id="17" name="포인트 막대"/>
           <p:cNvSpPr/>
           <p:nvPr/>
         </p:nvSpPr>
         <p:spPr>
           <a:xfrm>
-            <a:off x="8219236" y="1783080"/>
+            <a:off x="8066836" y="1892807"/>
+            <a:ext cx="54864" cy="4352544"/>
+          </a:xfrm>
+          <a:prstGeom prst="rect">
+            <a:avLst/>
+          </a:prstGeom>
+          <a:solidFill>
+            <a:srgbClr val="EA7BB3"/>
+          </a:solidFill>
+          <a:ln>
+            <a:noFill/>
+          </a:ln>
+        </p:spPr>
+        <p:txBody>
+          <a:bodyPr rtlCol="0" anchor="ctr"/>
+          <a:lstStyle/>
+          <a:p>
+            <a:pPr algn="ctr"/>
+          </a:p>
+        </p:txBody>
+      </p:sp>
+      <p:sp>
+        <p:nvSpPr>
+          <p:cNvPr id="18" name="번호 3"/>
+          <p:cNvSpPr/>
+          <p:nvPr/>
+        </p:nvSpPr>
+        <p:spPr>
+          <a:xfrm>
+            <a:off x="8249716" y="1965960"/>
             <a:ext cx="457200" cy="457200"/>
           </a:xfrm>
           <a:prstGeom prst="ellipse">
             <a:avLst/>
           </a:prstGeom>
           <a:solidFill>
-            <a:srgbClr val="3D26C5"/>
+            <a:srgbClr val="EA7BB3"/>
           </a:solidFill>
           <a:ln>
             <a:noFill/>
@@ -4553,7 +4946,7 @@
             <a:r>
               <a:rPr sz="1600" b="1" i="0">
                 <a:solidFill>
-                  <a:srgbClr val="FFFFFF"/>
+                  <a:srgbClr val="26231F"/>
                 </a:solidFill>
               </a:rPr>
               <a:t>3</a:t>
@@ -4563,14 +4956,14 @@
       </p:sp>
       <p:sp>
         <p:nvSpPr>
-          <p:cNvPr id="14" name="TextBox 13"/>
+          <p:cNvPr id="19" name="TextBox 18"/>
           <p:cNvSpPr txBox="1"/>
           <p:nvPr/>
         </p:nvSpPr>
         <p:spPr>
           <a:xfrm>
-            <a:off x="8173516" y="2377440"/>
-            <a:ext cx="3149498" cy="640080"/>
+            <a:off x="8203996" y="2560320"/>
+            <a:ext cx="3210458" cy="640080"/>
           </a:xfrm>
           <a:prstGeom prst="rect">
             <a:avLst/>
@@ -4591,7 +4984,7 @@
             <a:r>
               <a:rPr sz="1800" b="1" i="0">
                 <a:solidFill>
-                  <a:srgbClr val="1D115F"/>
+                  <a:srgbClr val="492738"/>
                 </a:solidFill>
               </a:rPr>
               <a:t>사진 · 영상</a:t>
@@ -4601,14 +4994,14 @@
       </p:sp>
       <p:sp>
         <p:nvSpPr>
-          <p:cNvPr id="15" name="TextBox 14"/>
+          <p:cNvPr id="20" name="TextBox 19"/>
           <p:cNvSpPr txBox="1"/>
           <p:nvPr/>
         </p:nvSpPr>
         <p:spPr>
           <a:xfrm>
-            <a:off x="8173516" y="3063240"/>
-            <a:ext cx="3149498" cy="3017520"/>
+            <a:off x="8203996" y="3246120"/>
+            <a:ext cx="3210458" cy="2971800"/>
           </a:xfrm>
           <a:prstGeom prst="rect">
             <a:avLst/>
@@ -4629,7 +5022,7 @@
             <a:r>
               <a:rPr sz="1500" b="0" i="0">
                 <a:solidFill>
-                  <a:srgbClr val="2B2B2B"/>
+                  <a:srgbClr val="26231F"/>
                 </a:solidFill>
               </a:rPr>
               <a:t>입력하세요</a:t>
@@ -4651,7 +5044,7 @@
     <p:bg>
       <p:bgPr>
         <a:solidFill>
-          <a:srgbClr val="3D26C5"/>
+          <a:srgbClr val="FDEAF4"/>
         </a:solidFill>
         <a:effectLst/>
       </p:bgPr>
@@ -4671,16 +5064,14 @@
         </p:nvSpPr>
         <p:spPr>
           <a:xfrm>
-            <a:off x="274320" y="274320"/>
-            <a:ext cx="11643055" cy="6309360"/>
-          </a:xfrm>
-          <a:prstGeom prst="roundRect">
-            <a:avLst>
-              <a:gd name="adj" fmla="val 3500"/>
-            </a:avLst>
+            <a:off x="640080" y="566928"/>
+            <a:ext cx="10911535" cy="10972"/>
+          </a:xfrm>
+          <a:prstGeom prst="rect">
+            <a:avLst/>
           </a:prstGeom>
           <a:solidFill>
-            <a:srgbClr val="FFFFFF"/>
+            <a:srgbClr val="26231F"/>
           </a:solidFill>
           <a:ln>
             <a:noFill/>
@@ -4696,6 +5087,73 @@
       </p:sp>
       <p:sp>
         <p:nvSpPr>
+          <p:cNvPr id="4" name="상단 라벨"/>
+          <p:cNvSpPr txBox="1"/>
+          <p:nvPr/>
+        </p:nvSpPr>
+        <p:spPr>
+          <a:xfrm>
+            <a:off x="640080" y="237744"/>
+            <a:ext cx="5486400" cy="274320"/>
+          </a:xfrm>
+          <a:prstGeom prst="rect">
+            <a:avLst/>
+          </a:prstGeom>
+          <a:noFill/>
+        </p:spPr>
+        <p:txBody>
+          <a:bodyPr wrap="square" lIns="54864" rIns="54864" tIns="27432" bIns="27432" anchor="ctr">
+            <a:noAutofit/>
+          </a:bodyPr>
+          <a:lstStyle/>
+          <a:p>
+            <a:pPr algn="l">
+              <a:lnSpc>
+                <a:spcPct val="115000"/>
+              </a:lnSpc>
+            </a:pPr>
+            <a:r>
+              <a:rPr sz="900" b="1" i="0" spc="250">
+                <a:solidFill>
+                  <a:srgbClr val="26231F"/>
+                </a:solidFill>
+              </a:rPr>
+              <a:t>WEDDING</a:t>
+            </a:r>
+          </a:p>
+        </p:txBody>
+      </p:sp>
+      <p:sp>
+        <p:nvSpPr>
+          <p:cNvPr id="5" name="포인트"/>
+          <p:cNvSpPr/>
+          <p:nvPr/>
+        </p:nvSpPr>
+        <p:spPr>
+          <a:xfrm>
+            <a:off x="11204143" y="246888"/>
+            <a:ext cx="237744" cy="237744"/>
+          </a:xfrm>
+          <a:prstGeom prst="sun">
+            <a:avLst/>
+          </a:prstGeom>
+          <a:solidFill>
+            <a:srgbClr val="EA7BB3"/>
+          </a:solidFill>
+          <a:ln>
+            <a:noFill/>
+          </a:ln>
+        </p:spPr>
+        <p:txBody>
+          <a:bodyPr rtlCol="0" anchor="ctr"/>
+          <a:lstStyle/>
+          <a:p>
+            <a:pPr algn="ctr"/>
+          </a:p>
+        </p:txBody>
+      </p:sp>
+      <p:sp>
+        <p:nvSpPr>
           <p:cNvPr id="2" name="Title 1"/>
           <p:cNvSpPr>
             <a:spLocks noGrp="1"/>
@@ -4706,8 +5164,8 @@
         </p:nvSpPr>
         <p:spPr>
           <a:xfrm>
-            <a:off x="731520" y="548640"/>
-            <a:ext cx="9448495" cy="868680"/>
+            <a:off x="640080" y="731520"/>
+            <a:ext cx="10911535" cy="822960"/>
           </a:xfrm>
         </p:spPr>
         <p:txBody>
@@ -4724,7 +5182,7 @@
             <a:r>
               <a:rPr sz="3000" b="1" i="0">
                 <a:solidFill>
-                  <a:srgbClr val="1D115F"/>
+                  <a:srgbClr val="26231F"/>
                 </a:solidFill>
               </a:rPr>
               <a:t>웨딩 사진</a:t>
@@ -4734,14 +5192,14 @@
       </p:sp>
       <p:sp>
         <p:nvSpPr>
-          <p:cNvPr id="4" name="사진 자리"/>
+          <p:cNvPr id="6" name="사진 자리"/>
           <p:cNvSpPr/>
           <p:nvPr/>
         </p:nvSpPr>
         <p:spPr>
           <a:xfrm>
-            <a:off x="731520" y="1600200"/>
-            <a:ext cx="3454298" cy="2217420"/>
+            <a:off x="640080" y="1783080"/>
+            <a:ext cx="3515258" cy="2194560"/>
           </a:xfrm>
           <a:prstGeom prst="roundRect">
             <a:avLst>
@@ -4749,12 +5207,10 @@
             </a:avLst>
           </a:prstGeom>
           <a:solidFill>
-            <a:srgbClr val="D7D1FA"/>
+            <a:srgbClr val="FAD1E6"/>
           </a:solidFill>
           <a:ln w="19050">
-            <a:solidFill>
-              <a:srgbClr val="3D26C5"/>
-            </a:solidFill>
+            <a:noFill/>
             <a:prstDash val="dash"/>
           </a:ln>
         </p:spPr>
@@ -4772,7 +5228,7 @@
             <a:r>
               <a:rPr sz="1200" b="0" i="0">
                 <a:solidFill>
-                  <a:srgbClr val="1D115F"/>
+                  <a:srgbClr val="8E8780"/>
                 </a:solidFill>
               </a:rPr>
               <a:t>사진 1</a:t>
@@ -4782,14 +5238,14 @@
       </p:sp>
       <p:sp>
         <p:nvSpPr>
-          <p:cNvPr id="5" name="사진 자리"/>
+          <p:cNvPr id="7" name="사진 자리"/>
           <p:cNvSpPr/>
           <p:nvPr/>
         </p:nvSpPr>
         <p:spPr>
           <a:xfrm>
-            <a:off x="4368698" y="1600200"/>
-            <a:ext cx="3454298" cy="2217420"/>
+            <a:off x="4338218" y="1783080"/>
+            <a:ext cx="3515258" cy="2194560"/>
           </a:xfrm>
           <a:prstGeom prst="roundRect">
             <a:avLst>
@@ -4797,12 +5253,10 @@
             </a:avLst>
           </a:prstGeom>
           <a:solidFill>
-            <a:srgbClr val="D7D1FA"/>
+            <a:srgbClr val="FAD1E6"/>
           </a:solidFill>
           <a:ln w="19050">
-            <a:solidFill>
-              <a:srgbClr val="3D26C5"/>
-            </a:solidFill>
+            <a:noFill/>
             <a:prstDash val="dash"/>
           </a:ln>
         </p:spPr>
@@ -4820,7 +5274,7 @@
             <a:r>
               <a:rPr sz="1200" b="0" i="0">
                 <a:solidFill>
-                  <a:srgbClr val="1D115F"/>
+                  <a:srgbClr val="8E8780"/>
                 </a:solidFill>
               </a:rPr>
               <a:t>사진 2</a:t>
@@ -4830,14 +5284,14 @@
       </p:sp>
       <p:sp>
         <p:nvSpPr>
-          <p:cNvPr id="6" name="사진 자리"/>
+          <p:cNvPr id="8" name="사진 자리"/>
           <p:cNvSpPr/>
           <p:nvPr/>
         </p:nvSpPr>
         <p:spPr>
           <a:xfrm>
-            <a:off x="8005876" y="1600200"/>
-            <a:ext cx="3454298" cy="2217420"/>
+            <a:off x="8036356" y="1783080"/>
+            <a:ext cx="3515258" cy="2194560"/>
           </a:xfrm>
           <a:prstGeom prst="roundRect">
             <a:avLst>
@@ -4845,12 +5299,10 @@
             </a:avLst>
           </a:prstGeom>
           <a:solidFill>
-            <a:srgbClr val="D7D1FA"/>
+            <a:srgbClr val="FAD1E6"/>
           </a:solidFill>
           <a:ln w="19050">
-            <a:solidFill>
-              <a:srgbClr val="3D26C5"/>
-            </a:solidFill>
+            <a:noFill/>
             <a:prstDash val="dash"/>
           </a:ln>
         </p:spPr>
@@ -4868,7 +5320,7 @@
             <a:r>
               <a:rPr sz="1200" b="0" i="0">
                 <a:solidFill>
-                  <a:srgbClr val="1D115F"/>
+                  <a:srgbClr val="8E8780"/>
                 </a:solidFill>
               </a:rPr>
               <a:t>사진 3</a:t>
@@ -4878,14 +5330,14 @@
       </p:sp>
       <p:sp>
         <p:nvSpPr>
-          <p:cNvPr id="7" name="사진 자리"/>
+          <p:cNvPr id="9" name="사진 자리"/>
           <p:cNvSpPr/>
           <p:nvPr/>
         </p:nvSpPr>
         <p:spPr>
           <a:xfrm>
-            <a:off x="731520" y="4000500"/>
-            <a:ext cx="3454298" cy="2217420"/>
+            <a:off x="640080" y="4160520"/>
+            <a:ext cx="3515258" cy="2194560"/>
           </a:xfrm>
           <a:prstGeom prst="roundRect">
             <a:avLst>
@@ -4893,12 +5345,10 @@
             </a:avLst>
           </a:prstGeom>
           <a:solidFill>
-            <a:srgbClr val="D7D1FA"/>
+            <a:srgbClr val="FAD1E6"/>
           </a:solidFill>
           <a:ln w="19050">
-            <a:solidFill>
-              <a:srgbClr val="3D26C5"/>
-            </a:solidFill>
+            <a:noFill/>
             <a:prstDash val="dash"/>
           </a:ln>
         </p:spPr>
@@ -4916,7 +5366,7 @@
             <a:r>
               <a:rPr sz="1200" b="0" i="0">
                 <a:solidFill>
-                  <a:srgbClr val="1D115F"/>
+                  <a:srgbClr val="8E8780"/>
                 </a:solidFill>
               </a:rPr>
               <a:t>사진 4</a:t>
@@ -4926,14 +5376,14 @@
       </p:sp>
       <p:sp>
         <p:nvSpPr>
-          <p:cNvPr id="8" name="사진 자리"/>
+          <p:cNvPr id="10" name="사진 자리"/>
           <p:cNvSpPr/>
           <p:nvPr/>
         </p:nvSpPr>
         <p:spPr>
           <a:xfrm>
-            <a:off x="4368698" y="4000500"/>
-            <a:ext cx="3454298" cy="2217420"/>
+            <a:off x="4338218" y="4160520"/>
+            <a:ext cx="3515258" cy="2194560"/>
           </a:xfrm>
           <a:prstGeom prst="roundRect">
             <a:avLst>
@@ -4941,12 +5391,10 @@
             </a:avLst>
           </a:prstGeom>
           <a:solidFill>
-            <a:srgbClr val="D7D1FA"/>
+            <a:srgbClr val="FAD1E6"/>
           </a:solidFill>
           <a:ln w="19050">
-            <a:solidFill>
-              <a:srgbClr val="3D26C5"/>
-            </a:solidFill>
+            <a:noFill/>
             <a:prstDash val="dash"/>
           </a:ln>
         </p:spPr>
@@ -4964,7 +5412,7 @@
             <a:r>
               <a:rPr sz="1200" b="0" i="0">
                 <a:solidFill>
-                  <a:srgbClr val="1D115F"/>
+                  <a:srgbClr val="8E8780"/>
                 </a:solidFill>
               </a:rPr>
               <a:t>사진 5</a:t>
@@ -4974,14 +5422,14 @@
       </p:sp>
       <p:sp>
         <p:nvSpPr>
-          <p:cNvPr id="9" name="사진 자리"/>
+          <p:cNvPr id="11" name="사진 자리"/>
           <p:cNvSpPr/>
           <p:nvPr/>
         </p:nvSpPr>
         <p:spPr>
           <a:xfrm>
-            <a:off x="8005876" y="4000500"/>
-            <a:ext cx="3454298" cy="2217420"/>
+            <a:off x="8036356" y="4160520"/>
+            <a:ext cx="3515258" cy="2194560"/>
           </a:xfrm>
           <a:prstGeom prst="roundRect">
             <a:avLst>
@@ -4989,12 +5437,10 @@
             </a:avLst>
           </a:prstGeom>
           <a:solidFill>
-            <a:srgbClr val="D7D1FA"/>
+            <a:srgbClr val="FAD1E6"/>
           </a:solidFill>
           <a:ln w="19050">
-            <a:solidFill>
-              <a:srgbClr val="3D26C5"/>
-            </a:solidFill>
+            <a:noFill/>
             <a:prstDash val="dash"/>
           </a:ln>
         </p:spPr>
@@ -5012,7 +5458,7 @@
             <a:r>
               <a:rPr sz="1200" b="0" i="0">
                 <a:solidFill>
-                  <a:srgbClr val="1D115F"/>
+                  <a:srgbClr val="8E8780"/>
                 </a:solidFill>
               </a:rPr>
               <a:t>사진 6</a:t>
@@ -5031,6 +5477,14 @@
 <file path=ppt/slides/slide6.xml><?xml version="1.0" encoding="utf-8"?>
 <p:sld xmlns:a="http://schemas.openxmlformats.org/drawingml/2006/main" xmlns:p="http://schemas.openxmlformats.org/presentationml/2006/main" xmlns:r="http://schemas.openxmlformats.org/officeDocument/2006/relationships">
   <p:cSld>
+    <p:bg>
+      <p:bgPr>
+        <a:solidFill>
+          <a:srgbClr val="FDEAF4"/>
+        </a:solidFill>
+        <a:effectLst/>
+      </p:bgPr>
+    </p:bg>
     <p:spTree>
       <p:nvGrpSpPr>
         <p:cNvPr id="1" name=""/>
@@ -5038,30 +5492,116 @@
         <p:nvPr/>
       </p:nvGrpSpPr>
       <p:grpSpPr/>
-      <p:pic>
-        <p:nvPicPr>
-          <p:cNvPr id="3" name="표지 그림" descr="wedding-25.jpg"/>
-          <p:cNvPicPr>
-            <a:picLocks noChangeAspect="1"/>
-          </p:cNvPicPr>
+      <p:sp>
+        <p:nvSpPr>
+          <p:cNvPr id="3" name="사진 자리"/>
+          <p:cNvSpPr/>
           <p:nvPr/>
-        </p:nvPicPr>
-        <p:blipFill>
-          <a:blip r:embed="rId2"/>
-          <a:stretch>
-            <a:fillRect/>
-          </a:stretch>
-        </p:blipFill>
-        <p:spPr>
-          <a:xfrm>
-            <a:off x="0" y="0"/>
-            <a:ext cx="12191695" cy="6858000"/>
+        </p:nvSpPr>
+        <p:spPr>
+          <a:xfrm>
+            <a:off x="7802684" y="0"/>
+            <a:ext cx="4389010" cy="6858000"/>
           </a:xfrm>
           <a:prstGeom prst="rect">
             <a:avLst/>
           </a:prstGeom>
-        </p:spPr>
-      </p:pic>
+          <a:solidFill>
+            <a:srgbClr val="F3A5CC"/>
+          </a:solidFill>
+          <a:ln>
+            <a:noFill/>
+          </a:ln>
+        </p:spPr>
+        <p:txBody>
+          <a:bodyPr rtlCol="0" anchor="ctr" wrap="square" lIns="54864" rIns="54864" tIns="27432" bIns="27432">
+            <a:noAutofit/>
+          </a:bodyPr>
+          <a:lstStyle/>
+          <a:p>
+            <a:pPr algn="ctr">
+              <a:lnSpc>
+                <a:spcPct val="100000"/>
+              </a:lnSpc>
+            </a:pPr>
+            <a:r>
+              <a:rPr sz="1400" b="0" i="0">
+                <a:solidFill>
+                  <a:srgbClr val="492738"/>
+                </a:solidFill>
+              </a:rPr>
+              <a:t>사진을 넣어 주세요</a:t>
+            </a:r>
+          </a:p>
+        </p:txBody>
+      </p:sp>
+      <p:sp>
+        <p:nvSpPr>
+          <p:cNvPr id="4" name="장식"/>
+          <p:cNvSpPr/>
+          <p:nvPr/>
+        </p:nvSpPr>
+        <p:spPr>
+          <a:xfrm>
+            <a:off x="8168435" y="365760"/>
+            <a:ext cx="3657508" cy="6126480"/>
+          </a:xfrm>
+          <a:prstGeom prst="rect">
+            <a:avLst/>
+          </a:prstGeom>
+          <a:noFill/>
+          <a:ln w="9525">
+            <a:solidFill>
+              <a:srgbClr val="26231F"/>
+            </a:solidFill>
+          </a:ln>
+        </p:spPr>
+        <p:txBody>
+          <a:bodyPr rtlCol="0" anchor="ctr"/>
+          <a:lstStyle/>
+          <a:p>
+            <a:pPr algn="ctr"/>
+          </a:p>
+        </p:txBody>
+      </p:sp>
+      <p:sp>
+        <p:nvSpPr>
+          <p:cNvPr id="5" name="라벨"/>
+          <p:cNvSpPr txBox="1"/>
+          <p:nvPr/>
+        </p:nvSpPr>
+        <p:spPr>
+          <a:xfrm>
+            <a:off x="822960" y="2148840"/>
+            <a:ext cx="5608179" cy="274320"/>
+          </a:xfrm>
+          <a:prstGeom prst="rect">
+            <a:avLst/>
+          </a:prstGeom>
+          <a:noFill/>
+        </p:spPr>
+        <p:txBody>
+          <a:bodyPr wrap="square" lIns="54864" rIns="54864" tIns="27432" bIns="27432" anchor="t">
+            <a:noAutofit/>
+          </a:bodyPr>
+          <a:lstStyle/>
+          <a:p>
+            <a:pPr algn="l">
+              <a:lnSpc>
+                <a:spcPct val="115000"/>
+              </a:lnSpc>
+            </a:pPr>
+            <a:r>
+              <a:rPr sz="1000" b="1" i="0" spc="250">
+                <a:solidFill>
+                  <a:srgbClr val="26231F"/>
+                </a:solidFill>
+              </a:rPr>
+              <a:t>WEDDING</a:t>
+            </a:r>
+          </a:p>
+        </p:txBody>
+      </p:sp>
       <p:sp>
         <p:nvSpPr>
           <p:cNvPr id="2" name="Title 1"/>
@@ -5074,8 +5614,8 @@
         </p:nvSpPr>
         <p:spPr>
           <a:xfrm>
-            <a:off x="853418" y="2057400"/>
-            <a:ext cx="6095847" cy="1554480"/>
+            <a:off x="822960" y="2606040"/>
+            <a:ext cx="5608179" cy="1188720"/>
           </a:xfrm>
         </p:spPr>
         <p:txBody>
@@ -5092,7 +5632,7 @@
             <a:r>
               <a:rPr sz="3400" b="1" i="0">
                 <a:solidFill>
-                  <a:srgbClr val="1D115F"/>
+                  <a:srgbClr val="26231F"/>
                 </a:solidFill>
               </a:rPr>
               <a:t>와 주셔서 고맙습니다</a:t>
@@ -5102,14 +5642,14 @@
       </p:sp>
       <p:sp>
         <p:nvSpPr>
-          <p:cNvPr id="4" name="한 줄 문구"/>
+          <p:cNvPr id="6" name="한 줄 문구"/>
           <p:cNvSpPr txBox="1"/>
           <p:nvPr/>
         </p:nvSpPr>
         <p:spPr>
           <a:xfrm>
-            <a:off x="853418" y="3749039"/>
-            <a:ext cx="6095847" cy="822960"/>
+            <a:off x="822960" y="3886200"/>
+            <a:ext cx="5608179" cy="822960"/>
           </a:xfrm>
           <a:prstGeom prst="rect">
             <a:avLst/>
@@ -5128,9 +5668,9 @@
               </a:lnSpc>
             </a:pPr>
             <a:r>
-              <a:rPr sz="1700" b="0" i="1">
-                <a:solidFill>
-                  <a:srgbClr val="1D115F"/>
+              <a:rPr sz="1700" b="0" i="0">
+                <a:solidFill>
+                  <a:srgbClr val="26231F"/>
                 </a:solidFill>
               </a:rPr>
               <a:t>잘 살겠습니다</a:t>
@@ -5140,14 +5680,14 @@
       </p:sp>
       <p:sp>
         <p:nvSpPr>
-          <p:cNvPr id="5" name="안내 문구"/>
+          <p:cNvPr id="7" name="안내 문구"/>
           <p:cNvSpPr txBox="1"/>
           <p:nvPr/>
         </p:nvSpPr>
         <p:spPr>
           <a:xfrm>
-            <a:off x="853418" y="4617720"/>
-            <a:ext cx="6095847" cy="914400"/>
+            <a:off x="822960" y="4754880"/>
+            <a:ext cx="5608179" cy="914400"/>
           </a:xfrm>
           <a:prstGeom prst="rect">
             <a:avLst/>
@@ -5168,7 +5708,7 @@
             <a:r>
               <a:rPr sz="1400" b="0" i="0">
                 <a:solidFill>
-                  <a:srgbClr val="666666"/>
+                  <a:srgbClr val="26231F"/>
                 </a:solidFill>
               </a:rPr>
               <a:t>신랑 이름 ♥ 신부 이름</a:t>
@@ -5195,34 +5735,34 @@
         <a:sysClr val="window" lastClr="FFFFFF"/>
       </a:lt1>
       <a:dk2>
-        <a:srgbClr val="1D115F"/>
+        <a:srgbClr val="492738"/>
       </a:dk2>
       <a:lt2>
-        <a:srgbClr val="F0EEFC"/>
+        <a:srgbClr val="FDEAF4"/>
       </a:lt2>
       <a:accent1>
-        <a:srgbClr val="3D26C5"/>
+        <a:srgbClr val="EA7BB3"/>
       </a:accent1>
       <a:accent2>
-        <a:srgbClr val="209DB6"/>
+        <a:srgbClr val="EF9FA1"/>
       </a:accent2>
       <a:accent3>
-        <a:srgbClr val="1D115F"/>
+        <a:srgbClr val="492738"/>
       </a:accent3>
       <a:accent4>
-        <a:srgbClr val="D7D1FA"/>
+        <a:srgbClr val="FAD1E6"/>
       </a:accent4>
       <a:accent5>
-        <a:srgbClr val="2E62BE"/>
+        <a:srgbClr val="EC8DAA"/>
       </a:accent5>
       <a:accent6>
-        <a:srgbClr val="77709F"/>
+        <a:srgbClr val="927D88"/>
       </a:accent6>
       <a:hlink>
-        <a:srgbClr val="3D26C5"/>
+        <a:srgbClr val="EA7BB3"/>
       </a:hlink>
       <a:folHlink>
-        <a:srgbClr val="1D115F"/>
+        <a:srgbClr val="492738"/>
       </a:folHlink>
     </a:clrScheme>
     <a:fontScheme name="Office">
